--- a/Materials.pptx
+++ b/Materials.pptx
@@ -8,6 +8,7 @@
     <p:sldId id="256" r:id="rId5"/>
     <p:sldId id="257" r:id="rId6"/>
     <p:sldId id="258" r:id="rId7"/>
+    <p:sldId id="259" r:id="rId8"/>
   </p:sldIdLst>
   <p:sldSz cx="12192000" cy="6858000"/>
   <p:notesSz cx="6858000" cy="9144000"/>
@@ -271,7 +272,7 @@
           <a:p>
             <a:fld id="{9236E18D-A30F-4D3C-BC15-86FA9E93A319}" type="datetimeFigureOut">
               <a:rPr kumimoji="1" lang="ja-JP" altLang="en-US" smtClean="0"/>
-              <a:t>2026/4/26</a:t>
+              <a:t>2026/4/30</a:t>
             </a:fld>
             <a:endParaRPr kumimoji="1" lang="ja-JP" altLang="en-US"/>
           </a:p>
@@ -471,7 +472,7 @@
           <a:p>
             <a:fld id="{9236E18D-A30F-4D3C-BC15-86FA9E93A319}" type="datetimeFigureOut">
               <a:rPr kumimoji="1" lang="ja-JP" altLang="en-US" smtClean="0"/>
-              <a:t>2026/4/26</a:t>
+              <a:t>2026/4/30</a:t>
             </a:fld>
             <a:endParaRPr kumimoji="1" lang="ja-JP" altLang="en-US"/>
           </a:p>
@@ -681,7 +682,7 @@
           <a:p>
             <a:fld id="{9236E18D-A30F-4D3C-BC15-86FA9E93A319}" type="datetimeFigureOut">
               <a:rPr kumimoji="1" lang="ja-JP" altLang="en-US" smtClean="0"/>
-              <a:t>2026/4/26</a:t>
+              <a:t>2026/4/30</a:t>
             </a:fld>
             <a:endParaRPr kumimoji="1" lang="ja-JP" altLang="en-US"/>
           </a:p>
@@ -881,7 +882,7 @@
           <a:p>
             <a:fld id="{9236E18D-A30F-4D3C-BC15-86FA9E93A319}" type="datetimeFigureOut">
               <a:rPr kumimoji="1" lang="ja-JP" altLang="en-US" smtClean="0"/>
-              <a:t>2026/4/26</a:t>
+              <a:t>2026/4/30</a:t>
             </a:fld>
             <a:endParaRPr kumimoji="1" lang="ja-JP" altLang="en-US"/>
           </a:p>
@@ -1157,7 +1158,7 @@
           <a:p>
             <a:fld id="{9236E18D-A30F-4D3C-BC15-86FA9E93A319}" type="datetimeFigureOut">
               <a:rPr kumimoji="1" lang="ja-JP" altLang="en-US" smtClean="0"/>
-              <a:t>2026/4/26</a:t>
+              <a:t>2026/4/30</a:t>
             </a:fld>
             <a:endParaRPr kumimoji="1" lang="ja-JP" altLang="en-US"/>
           </a:p>
@@ -1425,7 +1426,7 @@
           <a:p>
             <a:fld id="{9236E18D-A30F-4D3C-BC15-86FA9E93A319}" type="datetimeFigureOut">
               <a:rPr kumimoji="1" lang="ja-JP" altLang="en-US" smtClean="0"/>
-              <a:t>2026/4/26</a:t>
+              <a:t>2026/4/30</a:t>
             </a:fld>
             <a:endParaRPr kumimoji="1" lang="ja-JP" altLang="en-US"/>
           </a:p>
@@ -1840,7 +1841,7 @@
           <a:p>
             <a:fld id="{9236E18D-A30F-4D3C-BC15-86FA9E93A319}" type="datetimeFigureOut">
               <a:rPr kumimoji="1" lang="ja-JP" altLang="en-US" smtClean="0"/>
-              <a:t>2026/4/26</a:t>
+              <a:t>2026/4/30</a:t>
             </a:fld>
             <a:endParaRPr kumimoji="1" lang="ja-JP" altLang="en-US"/>
           </a:p>
@@ -1982,7 +1983,7 @@
           <a:p>
             <a:fld id="{9236E18D-A30F-4D3C-BC15-86FA9E93A319}" type="datetimeFigureOut">
               <a:rPr kumimoji="1" lang="ja-JP" altLang="en-US" smtClean="0"/>
-              <a:t>2026/4/26</a:t>
+              <a:t>2026/4/30</a:t>
             </a:fld>
             <a:endParaRPr kumimoji="1" lang="ja-JP" altLang="en-US"/>
           </a:p>
@@ -2095,7 +2096,7 @@
           <a:p>
             <a:fld id="{9236E18D-A30F-4D3C-BC15-86FA9E93A319}" type="datetimeFigureOut">
               <a:rPr kumimoji="1" lang="ja-JP" altLang="en-US" smtClean="0"/>
-              <a:t>2026/4/26</a:t>
+              <a:t>2026/4/30</a:t>
             </a:fld>
             <a:endParaRPr kumimoji="1" lang="ja-JP" altLang="en-US"/>
           </a:p>
@@ -2408,7 +2409,7 @@
           <a:p>
             <a:fld id="{9236E18D-A30F-4D3C-BC15-86FA9E93A319}" type="datetimeFigureOut">
               <a:rPr kumimoji="1" lang="ja-JP" altLang="en-US" smtClean="0"/>
-              <a:t>2026/4/26</a:t>
+              <a:t>2026/4/30</a:t>
             </a:fld>
             <a:endParaRPr kumimoji="1" lang="ja-JP" altLang="en-US"/>
           </a:p>
@@ -2697,7 +2698,7 @@
           <a:p>
             <a:fld id="{9236E18D-A30F-4D3C-BC15-86FA9E93A319}" type="datetimeFigureOut">
               <a:rPr kumimoji="1" lang="ja-JP" altLang="en-US" smtClean="0"/>
-              <a:t>2026/4/26</a:t>
+              <a:t>2026/4/30</a:t>
             </a:fld>
             <a:endParaRPr kumimoji="1" lang="ja-JP" altLang="en-US"/>
           </a:p>
@@ -2940,7 +2941,7 @@
           <a:p>
             <a:fld id="{9236E18D-A30F-4D3C-BC15-86FA9E93A319}" type="datetimeFigureOut">
               <a:rPr kumimoji="1" lang="ja-JP" altLang="en-US" smtClean="0"/>
-              <a:t>2026/4/26</a:t>
+              <a:t>2026/4/30</a:t>
             </a:fld>
             <a:endParaRPr kumimoji="1" lang="ja-JP" altLang="en-US"/>
           </a:p>
@@ -5533,88 +5534,6 @@
           <a:chExt cx="0" cy="0"/>
         </a:xfrm>
       </p:grpSpPr>
-      <p:cxnSp>
-        <p:nvCxnSpPr>
-          <p:cNvPr id="7" name="Straight Arrow Connector 6">
-            <a:extLst>
-              <a:ext uri="{FF2B5EF4-FFF2-40B4-BE49-F238E27FC236}">
-                <a16:creationId xmlns:a16="http://schemas.microsoft.com/office/drawing/2014/main" id="{FF07CD15-9F0E-4725-9C91-4B7450C0E403}"/>
-              </a:ext>
-            </a:extLst>
-          </p:cNvPr>
-          <p:cNvCxnSpPr>
-            <a:cxnSpLocks/>
-          </p:cNvCxnSpPr>
-          <p:nvPr/>
-        </p:nvCxnSpPr>
-        <p:spPr>
-          <a:xfrm>
-            <a:off x="10615909" y="5401413"/>
-            <a:ext cx="631825" cy="404813"/>
-          </a:xfrm>
-          <a:prstGeom prst="straightConnector1">
-            <a:avLst/>
-          </a:prstGeom>
-          <a:ln>
-            <a:tailEnd type="triangle"/>
-          </a:ln>
-        </p:spPr>
-        <p:style>
-          <a:lnRef idx="2">
-            <a:schemeClr val="accent1"/>
-          </a:lnRef>
-          <a:fillRef idx="0">
-            <a:schemeClr val="accent1"/>
-          </a:fillRef>
-          <a:effectRef idx="1">
-            <a:schemeClr val="accent1"/>
-          </a:effectRef>
-          <a:fontRef idx="minor">
-            <a:schemeClr val="tx1"/>
-          </a:fontRef>
-        </p:style>
-      </p:cxnSp>
-      <p:cxnSp>
-        <p:nvCxnSpPr>
-          <p:cNvPr id="10" name="Straight Connector 9">
-            <a:extLst>
-              <a:ext uri="{FF2B5EF4-FFF2-40B4-BE49-F238E27FC236}">
-                <a16:creationId xmlns:a16="http://schemas.microsoft.com/office/drawing/2014/main" id="{0CBCFBC5-86A2-BAAC-DD0A-465552F34598}"/>
-              </a:ext>
-            </a:extLst>
-          </p:cNvPr>
-          <p:cNvCxnSpPr>
-            <a:cxnSpLocks/>
-          </p:cNvCxnSpPr>
-          <p:nvPr/>
-        </p:nvCxnSpPr>
-        <p:spPr>
-          <a:xfrm>
-            <a:off x="10348156" y="5158382"/>
-            <a:ext cx="0" cy="1098550"/>
-          </a:xfrm>
-          <a:prstGeom prst="line">
-            <a:avLst/>
-          </a:prstGeom>
-          <a:ln>
-            <a:prstDash val="dashDot"/>
-          </a:ln>
-        </p:spPr>
-        <p:style>
-          <a:lnRef idx="2">
-            <a:schemeClr val="dk1"/>
-          </a:lnRef>
-          <a:fillRef idx="0">
-            <a:schemeClr val="dk1"/>
-          </a:fillRef>
-          <a:effectRef idx="1">
-            <a:schemeClr val="dk1"/>
-          </a:effectRef>
-          <a:fontRef idx="minor">
-            <a:schemeClr val="tx1"/>
-          </a:fontRef>
-        </p:style>
-      </p:cxnSp>
       <p:sp>
         <p:nvSpPr>
           <p:cNvPr id="14" name="Freeform: Shape 13">
@@ -7120,6 +7039,558 @@
 </p:sld>
 </file>
 
+<file path=ppt/slides/slide4.xml><?xml version="1.0" encoding="utf-8"?>
+<p:sld xmlns:a="http://schemas.openxmlformats.org/drawingml/2006/main" xmlns:r="http://schemas.openxmlformats.org/officeDocument/2006/relationships" xmlns:p="http://schemas.openxmlformats.org/presentationml/2006/main">
+  <p:cSld>
+    <p:spTree>
+      <p:nvGrpSpPr>
+        <p:cNvPr id="1" name=""/>
+        <p:cNvGrpSpPr/>
+        <p:nvPr/>
+      </p:nvGrpSpPr>
+      <p:grpSpPr>
+        <a:xfrm>
+          <a:off x="0" y="0"/>
+          <a:ext cx="0" cy="0"/>
+          <a:chOff x="0" y="0"/>
+          <a:chExt cx="0" cy="0"/>
+        </a:xfrm>
+      </p:grpSpPr>
+      <p:sp>
+        <p:nvSpPr>
+          <p:cNvPr id="4" name="Oval 3">
+            <a:extLst>
+              <a:ext uri="{FF2B5EF4-FFF2-40B4-BE49-F238E27FC236}">
+                <a16:creationId xmlns:a16="http://schemas.microsoft.com/office/drawing/2014/main" id="{DE1CD74A-F737-D5D1-554B-70604072A7E3}"/>
+              </a:ext>
+            </a:extLst>
+          </p:cNvPr>
+          <p:cNvSpPr/>
+          <p:nvPr/>
+        </p:nvSpPr>
+        <p:spPr>
+          <a:xfrm>
+            <a:off x="2946400" y="1981200"/>
+            <a:ext cx="1479550" cy="2120900"/>
+          </a:xfrm>
+          <a:prstGeom prst="ellipse">
+            <a:avLst/>
+          </a:prstGeom>
+          <a:solidFill>
+            <a:schemeClr val="bg2">
+              <a:lumMod val="90000"/>
+            </a:schemeClr>
+          </a:solidFill>
+        </p:spPr>
+        <p:style>
+          <a:lnRef idx="2">
+            <a:schemeClr val="dk1">
+              <a:shade val="15000"/>
+            </a:schemeClr>
+          </a:lnRef>
+          <a:fillRef idx="1">
+            <a:schemeClr val="dk1"/>
+          </a:fillRef>
+          <a:effectRef idx="0">
+            <a:schemeClr val="dk1"/>
+          </a:effectRef>
+          <a:fontRef idx="minor">
+            <a:schemeClr val="lt1"/>
+          </a:fontRef>
+        </p:style>
+        <p:txBody>
+          <a:bodyPr rtlCol="0" anchor="ctr"/>
+          <a:lstStyle/>
+          <a:p>
+            <a:pPr algn="ctr"/>
+            <a:endParaRPr kumimoji="1" lang="ja-JP" altLang="en-US" dirty="0"/>
+          </a:p>
+        </p:txBody>
+      </p:sp>
+      <p:sp>
+        <p:nvSpPr>
+          <p:cNvPr id="5" name="Oval 4">
+            <a:extLst>
+              <a:ext uri="{FF2B5EF4-FFF2-40B4-BE49-F238E27FC236}">
+                <a16:creationId xmlns:a16="http://schemas.microsoft.com/office/drawing/2014/main" id="{B8967F52-3B59-05D8-ABAB-EABB44C8059D}"/>
+              </a:ext>
+            </a:extLst>
+          </p:cNvPr>
+          <p:cNvSpPr/>
+          <p:nvPr/>
+        </p:nvSpPr>
+        <p:spPr>
+          <a:xfrm>
+            <a:off x="3282950" y="2495550"/>
+            <a:ext cx="737532" cy="1057234"/>
+          </a:xfrm>
+          <a:prstGeom prst="ellipse">
+            <a:avLst/>
+          </a:prstGeom>
+          <a:solidFill>
+            <a:schemeClr val="bg1"/>
+          </a:solidFill>
+        </p:spPr>
+        <p:style>
+          <a:lnRef idx="2">
+            <a:schemeClr val="dk1">
+              <a:shade val="15000"/>
+            </a:schemeClr>
+          </a:lnRef>
+          <a:fillRef idx="1">
+            <a:schemeClr val="dk1"/>
+          </a:fillRef>
+          <a:effectRef idx="0">
+            <a:schemeClr val="dk1"/>
+          </a:effectRef>
+          <a:fontRef idx="minor">
+            <a:schemeClr val="lt1"/>
+          </a:fontRef>
+        </p:style>
+        <p:txBody>
+          <a:bodyPr rtlCol="0" anchor="ctr"/>
+          <a:lstStyle/>
+          <a:p>
+            <a:pPr algn="ctr"/>
+            <a:endParaRPr kumimoji="1" lang="ja-JP" altLang="en-US"/>
+          </a:p>
+        </p:txBody>
+      </p:sp>
+      <p:cxnSp>
+        <p:nvCxnSpPr>
+          <p:cNvPr id="7" name="Straight Connector 6">
+            <a:extLst>
+              <a:ext uri="{FF2B5EF4-FFF2-40B4-BE49-F238E27FC236}">
+                <a16:creationId xmlns:a16="http://schemas.microsoft.com/office/drawing/2014/main" id="{A6259DBD-9E4D-4CC2-BE54-2818D54D0DEF}"/>
+              </a:ext>
+            </a:extLst>
+          </p:cNvPr>
+          <p:cNvCxnSpPr>
+            <a:stCxn id="4" idx="0"/>
+          </p:cNvCxnSpPr>
+          <p:nvPr/>
+        </p:nvCxnSpPr>
+        <p:spPr>
+          <a:xfrm>
+            <a:off x="3686175" y="1981200"/>
+            <a:ext cx="3971925" cy="0"/>
+          </a:xfrm>
+          <a:prstGeom prst="line">
+            <a:avLst/>
+          </a:prstGeom>
+        </p:spPr>
+        <p:style>
+          <a:lnRef idx="2">
+            <a:schemeClr val="dk1"/>
+          </a:lnRef>
+          <a:fillRef idx="0">
+            <a:schemeClr val="dk1"/>
+          </a:fillRef>
+          <a:effectRef idx="1">
+            <a:schemeClr val="dk1"/>
+          </a:effectRef>
+          <a:fontRef idx="minor">
+            <a:schemeClr val="tx1"/>
+          </a:fontRef>
+        </p:style>
+      </p:cxnSp>
+      <p:cxnSp>
+        <p:nvCxnSpPr>
+          <p:cNvPr id="8" name="Straight Connector 7">
+            <a:extLst>
+              <a:ext uri="{FF2B5EF4-FFF2-40B4-BE49-F238E27FC236}">
+                <a16:creationId xmlns:a16="http://schemas.microsoft.com/office/drawing/2014/main" id="{0B171B55-E2D9-CB95-0358-6F3DC77B8F29}"/>
+              </a:ext>
+            </a:extLst>
+          </p:cNvPr>
+          <p:cNvCxnSpPr>
+            <a:cxnSpLocks/>
+            <a:stCxn id="4" idx="4"/>
+          </p:cNvCxnSpPr>
+          <p:nvPr/>
+        </p:nvCxnSpPr>
+        <p:spPr>
+          <a:xfrm>
+            <a:off x="3686175" y="4102100"/>
+            <a:ext cx="4079877" cy="0"/>
+          </a:xfrm>
+          <a:prstGeom prst="line">
+            <a:avLst/>
+          </a:prstGeom>
+        </p:spPr>
+        <p:style>
+          <a:lnRef idx="2">
+            <a:schemeClr val="dk1"/>
+          </a:lnRef>
+          <a:fillRef idx="0">
+            <a:schemeClr val="dk1"/>
+          </a:fillRef>
+          <a:effectRef idx="1">
+            <a:schemeClr val="dk1"/>
+          </a:effectRef>
+          <a:fontRef idx="minor">
+            <a:schemeClr val="tx1"/>
+          </a:fontRef>
+        </p:style>
+      </p:cxnSp>
+      <p:sp>
+        <p:nvSpPr>
+          <p:cNvPr id="17" name="TextBox 16">
+            <a:extLst>
+              <a:ext uri="{FF2B5EF4-FFF2-40B4-BE49-F238E27FC236}">
+                <a16:creationId xmlns:a16="http://schemas.microsoft.com/office/drawing/2014/main" id="{0995D5CF-252B-3FA6-9ACC-88CEA6D1F1B1}"/>
+              </a:ext>
+            </a:extLst>
+          </p:cNvPr>
+          <p:cNvSpPr txBox="1"/>
+          <p:nvPr/>
+        </p:nvSpPr>
+        <p:spPr>
+          <a:xfrm>
+            <a:off x="3407092" y="2071193"/>
+            <a:ext cx="558166" cy="369332"/>
+          </a:xfrm>
+          <a:prstGeom prst="rect">
+            <a:avLst/>
+          </a:prstGeom>
+          <a:noFill/>
+        </p:spPr>
+        <p:txBody>
+          <a:bodyPr wrap="none" rtlCol="0">
+            <a:spAutoFit/>
+          </a:bodyPr>
+          <a:lstStyle/>
+          <a:p>
+            <a:r>
+              <a:rPr kumimoji="1" lang="en-US" altLang="ja-JP" dirty="0" err="1">
+                <a:latin typeface="times" panose="02020603050405020304" pitchFamily="18" charset="0"/>
+                <a:cs typeface="times" panose="02020603050405020304" pitchFamily="18" charset="0"/>
+              </a:rPr>
+              <a:t>n</a:t>
+            </a:r>
+            <a:r>
+              <a:rPr kumimoji="1" lang="en-US" altLang="ja-JP" baseline="-25000" dirty="0" err="1">
+                <a:latin typeface="times" panose="02020603050405020304" pitchFamily="18" charset="0"/>
+                <a:cs typeface="times" panose="02020603050405020304" pitchFamily="18" charset="0"/>
+              </a:rPr>
+              <a:t>clad</a:t>
+            </a:r>
+            <a:endParaRPr kumimoji="1" lang="ja-JP" altLang="en-US" baseline="-25000" dirty="0">
+              <a:latin typeface="times" panose="02020603050405020304" pitchFamily="18" charset="0"/>
+              <a:cs typeface="times" panose="02020603050405020304" pitchFamily="18" charset="0"/>
+            </a:endParaRPr>
+          </a:p>
+        </p:txBody>
+      </p:sp>
+      <p:sp>
+        <p:nvSpPr>
+          <p:cNvPr id="18" name="TextBox 17">
+            <a:extLst>
+              <a:ext uri="{FF2B5EF4-FFF2-40B4-BE49-F238E27FC236}">
+                <a16:creationId xmlns:a16="http://schemas.microsoft.com/office/drawing/2014/main" id="{4F55D5FE-54C5-6F8A-E447-040355450C1F}"/>
+              </a:ext>
+            </a:extLst>
+          </p:cNvPr>
+          <p:cNvSpPr txBox="1"/>
+          <p:nvPr/>
+        </p:nvSpPr>
+        <p:spPr>
+          <a:xfrm>
+            <a:off x="3380549" y="2883993"/>
+            <a:ext cx="566181" cy="369332"/>
+          </a:xfrm>
+          <a:prstGeom prst="rect">
+            <a:avLst/>
+          </a:prstGeom>
+          <a:noFill/>
+        </p:spPr>
+        <p:txBody>
+          <a:bodyPr wrap="none" rtlCol="0">
+            <a:spAutoFit/>
+          </a:bodyPr>
+          <a:lstStyle/>
+          <a:p>
+            <a:r>
+              <a:rPr kumimoji="1" lang="en-US" altLang="ja-JP" dirty="0" err="1">
+                <a:latin typeface="times" panose="02020603050405020304" pitchFamily="18" charset="0"/>
+                <a:cs typeface="times" panose="02020603050405020304" pitchFamily="18" charset="0"/>
+              </a:rPr>
+              <a:t>n</a:t>
+            </a:r>
+            <a:r>
+              <a:rPr kumimoji="1" lang="en-US" altLang="ja-JP" baseline="-25000" dirty="0" err="1">
+                <a:latin typeface="times" panose="02020603050405020304" pitchFamily="18" charset="0"/>
+                <a:cs typeface="times" panose="02020603050405020304" pitchFamily="18" charset="0"/>
+              </a:rPr>
+              <a:t>core</a:t>
+            </a:r>
+            <a:endParaRPr kumimoji="1" lang="ja-JP" altLang="en-US" baseline="-25000" dirty="0">
+              <a:latin typeface="times" panose="02020603050405020304" pitchFamily="18" charset="0"/>
+              <a:cs typeface="times" panose="02020603050405020304" pitchFamily="18" charset="0"/>
+            </a:endParaRPr>
+          </a:p>
+        </p:txBody>
+      </p:sp>
+      <p:cxnSp>
+        <p:nvCxnSpPr>
+          <p:cNvPr id="20" name="Straight Arrow Connector 19">
+            <a:extLst>
+              <a:ext uri="{FF2B5EF4-FFF2-40B4-BE49-F238E27FC236}">
+                <a16:creationId xmlns:a16="http://schemas.microsoft.com/office/drawing/2014/main" id="{045E283A-093A-FB76-0A34-F470FCF62CEA}"/>
+              </a:ext>
+            </a:extLst>
+          </p:cNvPr>
+          <p:cNvCxnSpPr/>
+          <p:nvPr/>
+        </p:nvCxnSpPr>
+        <p:spPr>
+          <a:xfrm>
+            <a:off x="1693193" y="3150632"/>
+            <a:ext cx="996950" cy="0"/>
+          </a:xfrm>
+          <a:prstGeom prst="straightConnector1">
+            <a:avLst/>
+          </a:prstGeom>
+          <a:ln>
+            <a:tailEnd type="triangle"/>
+          </a:ln>
+        </p:spPr>
+        <p:style>
+          <a:lnRef idx="2">
+            <a:schemeClr val="dk1"/>
+          </a:lnRef>
+          <a:fillRef idx="0">
+            <a:schemeClr val="dk1"/>
+          </a:fillRef>
+          <a:effectRef idx="1">
+            <a:schemeClr val="dk1"/>
+          </a:effectRef>
+          <a:fontRef idx="minor">
+            <a:schemeClr val="tx1"/>
+          </a:fontRef>
+        </p:style>
+      </p:cxnSp>
+      <p:cxnSp>
+        <p:nvCxnSpPr>
+          <p:cNvPr id="21" name="Straight Arrow Connector 20">
+            <a:extLst>
+              <a:ext uri="{FF2B5EF4-FFF2-40B4-BE49-F238E27FC236}">
+                <a16:creationId xmlns:a16="http://schemas.microsoft.com/office/drawing/2014/main" id="{F81FB1E9-7425-2D48-5201-E3CD6A91171E}"/>
+              </a:ext>
+            </a:extLst>
+          </p:cNvPr>
+          <p:cNvCxnSpPr>
+            <a:cxnSpLocks/>
+          </p:cNvCxnSpPr>
+          <p:nvPr/>
+        </p:nvCxnSpPr>
+        <p:spPr>
+          <a:xfrm flipV="1">
+            <a:off x="1699543" y="2356882"/>
+            <a:ext cx="0" cy="787400"/>
+          </a:xfrm>
+          <a:prstGeom prst="straightConnector1">
+            <a:avLst/>
+          </a:prstGeom>
+          <a:ln>
+            <a:tailEnd type="triangle"/>
+          </a:ln>
+        </p:spPr>
+        <p:style>
+          <a:lnRef idx="2">
+            <a:schemeClr val="dk1"/>
+          </a:lnRef>
+          <a:fillRef idx="0">
+            <a:schemeClr val="dk1"/>
+          </a:fillRef>
+          <a:effectRef idx="1">
+            <a:schemeClr val="dk1"/>
+          </a:effectRef>
+          <a:fontRef idx="minor">
+            <a:schemeClr val="tx1"/>
+          </a:fontRef>
+        </p:style>
+      </p:cxnSp>
+      <p:cxnSp>
+        <p:nvCxnSpPr>
+          <p:cNvPr id="23" name="Straight Arrow Connector 22">
+            <a:extLst>
+              <a:ext uri="{FF2B5EF4-FFF2-40B4-BE49-F238E27FC236}">
+                <a16:creationId xmlns:a16="http://schemas.microsoft.com/office/drawing/2014/main" id="{061D44DA-3B20-BA49-6B9B-F417DECF01FC}"/>
+              </a:ext>
+            </a:extLst>
+          </p:cNvPr>
+          <p:cNvCxnSpPr>
+            <a:cxnSpLocks/>
+          </p:cNvCxnSpPr>
+          <p:nvPr/>
+        </p:nvCxnSpPr>
+        <p:spPr>
+          <a:xfrm>
+            <a:off x="1699543" y="3150632"/>
+            <a:ext cx="679450" cy="323850"/>
+          </a:xfrm>
+          <a:prstGeom prst="straightConnector1">
+            <a:avLst/>
+          </a:prstGeom>
+          <a:ln>
+            <a:tailEnd type="triangle"/>
+          </a:ln>
+        </p:spPr>
+        <p:style>
+          <a:lnRef idx="2">
+            <a:schemeClr val="dk1"/>
+          </a:lnRef>
+          <a:fillRef idx="0">
+            <a:schemeClr val="dk1"/>
+          </a:fillRef>
+          <a:effectRef idx="1">
+            <a:schemeClr val="dk1"/>
+          </a:effectRef>
+          <a:fontRef idx="minor">
+            <a:schemeClr val="tx1"/>
+          </a:fontRef>
+        </p:style>
+      </p:cxnSp>
+      <p:sp>
+        <p:nvSpPr>
+          <p:cNvPr id="26" name="TextBox 25">
+            <a:extLst>
+              <a:ext uri="{FF2B5EF4-FFF2-40B4-BE49-F238E27FC236}">
+                <a16:creationId xmlns:a16="http://schemas.microsoft.com/office/drawing/2014/main" id="{BD3E61E5-18F8-6307-9D1F-99A44501E02F}"/>
+              </a:ext>
+            </a:extLst>
+          </p:cNvPr>
+          <p:cNvSpPr txBox="1"/>
+          <p:nvPr/>
+        </p:nvSpPr>
+        <p:spPr>
+          <a:xfrm>
+            <a:off x="1549502" y="1981200"/>
+            <a:ext cx="300082" cy="369332"/>
+          </a:xfrm>
+          <a:prstGeom prst="rect">
+            <a:avLst/>
+          </a:prstGeom>
+          <a:noFill/>
+        </p:spPr>
+        <p:txBody>
+          <a:bodyPr wrap="none" rtlCol="0">
+            <a:spAutoFit/>
+          </a:bodyPr>
+          <a:lstStyle/>
+          <a:p>
+            <a:r>
+              <a:rPr kumimoji="1" lang="en-US" altLang="ja-JP" dirty="0">
+                <a:latin typeface="times" panose="02020603050405020304" pitchFamily="18" charset="0"/>
+                <a:cs typeface="times" panose="02020603050405020304" pitchFamily="18" charset="0"/>
+              </a:rPr>
+              <a:t>x</a:t>
+            </a:r>
+            <a:endParaRPr kumimoji="1" lang="ja-JP" altLang="en-US" dirty="0">
+              <a:latin typeface="times" panose="02020603050405020304" pitchFamily="18" charset="0"/>
+              <a:cs typeface="times" panose="02020603050405020304" pitchFamily="18" charset="0"/>
+            </a:endParaRPr>
+          </a:p>
+        </p:txBody>
+      </p:sp>
+      <p:sp>
+        <p:nvSpPr>
+          <p:cNvPr id="27" name="TextBox 26">
+            <a:extLst>
+              <a:ext uri="{FF2B5EF4-FFF2-40B4-BE49-F238E27FC236}">
+                <a16:creationId xmlns:a16="http://schemas.microsoft.com/office/drawing/2014/main" id="{9222EEB3-9C8E-EB00-0555-56FAFEE6E44C}"/>
+              </a:ext>
+            </a:extLst>
+          </p:cNvPr>
+          <p:cNvSpPr txBox="1"/>
+          <p:nvPr/>
+        </p:nvSpPr>
+        <p:spPr>
+          <a:xfrm>
+            <a:off x="2363845" y="3312557"/>
+            <a:ext cx="300082" cy="369332"/>
+          </a:xfrm>
+          <a:prstGeom prst="rect">
+            <a:avLst/>
+          </a:prstGeom>
+          <a:noFill/>
+        </p:spPr>
+        <p:txBody>
+          <a:bodyPr wrap="none" rtlCol="0">
+            <a:spAutoFit/>
+          </a:bodyPr>
+          <a:lstStyle/>
+          <a:p>
+            <a:r>
+              <a:rPr kumimoji="1" lang="en-US" altLang="ja-JP" dirty="0">
+                <a:latin typeface="times" panose="02020603050405020304" pitchFamily="18" charset="0"/>
+                <a:cs typeface="times" panose="02020603050405020304" pitchFamily="18" charset="0"/>
+              </a:rPr>
+              <a:t>y</a:t>
+            </a:r>
+            <a:endParaRPr kumimoji="1" lang="ja-JP" altLang="en-US" dirty="0">
+              <a:latin typeface="times" panose="02020603050405020304" pitchFamily="18" charset="0"/>
+              <a:cs typeface="times" panose="02020603050405020304" pitchFamily="18" charset="0"/>
+            </a:endParaRPr>
+          </a:p>
+        </p:txBody>
+      </p:sp>
+      <p:sp>
+        <p:nvSpPr>
+          <p:cNvPr id="28" name="TextBox 27">
+            <a:extLst>
+              <a:ext uri="{FF2B5EF4-FFF2-40B4-BE49-F238E27FC236}">
+                <a16:creationId xmlns:a16="http://schemas.microsoft.com/office/drawing/2014/main" id="{76B9B83F-2574-D5EF-8F4C-7699F3AB710E}"/>
+              </a:ext>
+            </a:extLst>
+          </p:cNvPr>
+          <p:cNvSpPr txBox="1"/>
+          <p:nvPr/>
+        </p:nvSpPr>
+        <p:spPr>
+          <a:xfrm>
+            <a:off x="2385343" y="2813050"/>
+            <a:ext cx="287258" cy="369332"/>
+          </a:xfrm>
+          <a:prstGeom prst="rect">
+            <a:avLst/>
+          </a:prstGeom>
+          <a:noFill/>
+        </p:spPr>
+        <p:txBody>
+          <a:bodyPr wrap="none" rtlCol="0">
+            <a:spAutoFit/>
+          </a:bodyPr>
+          <a:lstStyle/>
+          <a:p>
+            <a:r>
+              <a:rPr kumimoji="1" lang="en-US" altLang="ja-JP" dirty="0">
+                <a:latin typeface="times" panose="02020603050405020304" pitchFamily="18" charset="0"/>
+                <a:cs typeface="times" panose="02020603050405020304" pitchFamily="18" charset="0"/>
+              </a:rPr>
+              <a:t>z</a:t>
+            </a:r>
+            <a:endParaRPr kumimoji="1" lang="ja-JP" altLang="en-US" dirty="0">
+              <a:latin typeface="times" panose="02020603050405020304" pitchFamily="18" charset="0"/>
+              <a:cs typeface="times" panose="02020603050405020304" pitchFamily="18" charset="0"/>
+            </a:endParaRPr>
+          </a:p>
+        </p:txBody>
+      </p:sp>
+    </p:spTree>
+    <p:extLst>
+      <p:ext uri="{BB962C8B-B14F-4D97-AF65-F5344CB8AC3E}">
+        <p14:creationId xmlns:p14="http://schemas.microsoft.com/office/powerpoint/2010/main" val="3849236896"/>
+      </p:ext>
+    </p:extLst>
+  </p:cSld>
+  <p:clrMapOvr>
+    <a:masterClrMapping/>
+  </p:clrMapOvr>
+</p:sld>
+</file>
+
 <file path=ppt/theme/theme1.xml><?xml version="1.0" encoding="utf-8"?>
 <a:theme xmlns:a="http://schemas.openxmlformats.org/drawingml/2006/main" name="Office Theme">
   <a:themeElements>
@@ -7436,12 +7907,11 @@
 </file>
 
 <file path=customXml/item1.xml><?xml version="1.0" encoding="utf-8"?>
-<?mso-contentType ?>
-<FormTemplates xmlns="http://schemas.microsoft.com/sharepoint/v3/contenttype/forms">
-  <Display>DocumentLibraryForm</Display>
-  <Edit>DocumentLibraryForm</Edit>
-  <New>DocumentLibraryForm</New>
-</FormTemplates>
+<p:properties xmlns:p="http://schemas.microsoft.com/office/2006/metadata/properties" xmlns:xsi="http://www.w3.org/2001/XMLSchema-instance" xmlns:pc="http://schemas.microsoft.com/office/infopath/2007/PartnerControls">
+  <documentManagement>
+    <_activity xmlns="e5fea337-426f-4878-aaa1-6cc4dbed00d3" xsi:nil="true"/>
+  </documentManagement>
+</p:properties>
 </file>
 
 <file path=customXml/item2.xml><?xml version="1.0" encoding="utf-8"?>
@@ -7639,17 +8109,26 @@
 </file>
 
 <file path=customXml/item3.xml><?xml version="1.0" encoding="utf-8"?>
-<p:properties xmlns:p="http://schemas.microsoft.com/office/2006/metadata/properties" xmlns:xsi="http://www.w3.org/2001/XMLSchema-instance" xmlns:pc="http://schemas.microsoft.com/office/infopath/2007/PartnerControls">
-  <documentManagement>
-    <_activity xmlns="e5fea337-426f-4878-aaa1-6cc4dbed00d3" xsi:nil="true"/>
-  </documentManagement>
-</p:properties>
+<?mso-contentType ?>
+<FormTemplates xmlns="http://schemas.microsoft.com/sharepoint/v3/contenttype/forms">
+  <Display>DocumentLibraryForm</Display>
+  <Edit>DocumentLibraryForm</Edit>
+  <New>DocumentLibraryForm</New>
+</FormTemplates>
 </file>
 
 <file path=customXml/itemProps1.xml><?xml version="1.0" encoding="utf-8"?>
-<ds:datastoreItem xmlns:ds="http://schemas.openxmlformats.org/officeDocument/2006/customXml" ds:itemID="{EBB85C3E-FFAD-4A75-A769-4B97E54A903C}">
+<ds:datastoreItem xmlns:ds="http://schemas.openxmlformats.org/officeDocument/2006/customXml" ds:itemID="{E690C700-0B54-4769-9477-9FE646BEDBDF}">
   <ds:schemaRefs>
-    <ds:schemaRef ds:uri="http://schemas.microsoft.com/sharepoint/v3/contenttype/forms"/>
+    <ds:schemaRef ds:uri="e5fea337-426f-4878-aaa1-6cc4dbed00d3"/>
+    <ds:schemaRef ds:uri="http://schemas.microsoft.com/office/infopath/2007/PartnerControls"/>
+    <ds:schemaRef ds:uri="http://www.w3.org/XML/1998/namespace"/>
+    <ds:schemaRef ds:uri="http://schemas.microsoft.com/office/2006/documentManagement/types"/>
+    <ds:schemaRef ds:uri="http://purl.org/dc/dcmitype/"/>
+    <ds:schemaRef ds:uri="http://purl.org/dc/terms/"/>
+    <ds:schemaRef ds:uri="http://purl.org/dc/elements/1.1/"/>
+    <ds:schemaRef ds:uri="http://schemas.openxmlformats.org/package/2006/metadata/core-properties"/>
+    <ds:schemaRef ds:uri="http://schemas.microsoft.com/office/2006/metadata/properties"/>
   </ds:schemaRefs>
 </ds:datastoreItem>
 </file>
@@ -7673,17 +8152,9 @@
 </file>
 
 <file path=customXml/itemProps3.xml><?xml version="1.0" encoding="utf-8"?>
-<ds:datastoreItem xmlns:ds="http://schemas.openxmlformats.org/officeDocument/2006/customXml" ds:itemID="{E690C700-0B54-4769-9477-9FE646BEDBDF}">
+<ds:datastoreItem xmlns:ds="http://schemas.openxmlformats.org/officeDocument/2006/customXml" ds:itemID="{EBB85C3E-FFAD-4A75-A769-4B97E54A903C}">
   <ds:schemaRefs>
-    <ds:schemaRef ds:uri="e5fea337-426f-4878-aaa1-6cc4dbed00d3"/>
-    <ds:schemaRef ds:uri="http://schemas.microsoft.com/office/infopath/2007/PartnerControls"/>
-    <ds:schemaRef ds:uri="http://www.w3.org/XML/1998/namespace"/>
-    <ds:schemaRef ds:uri="http://schemas.microsoft.com/office/2006/documentManagement/types"/>
-    <ds:schemaRef ds:uri="http://purl.org/dc/dcmitype/"/>
-    <ds:schemaRef ds:uri="http://purl.org/dc/terms/"/>
-    <ds:schemaRef ds:uri="http://purl.org/dc/elements/1.1/"/>
-    <ds:schemaRef ds:uri="http://schemas.openxmlformats.org/package/2006/metadata/core-properties"/>
-    <ds:schemaRef ds:uri="http://schemas.microsoft.com/office/2006/metadata/properties"/>
+    <ds:schemaRef ds:uri="http://schemas.microsoft.com/sharepoint/v3/contenttype/forms"/>
   </ds:schemaRefs>
 </ds:datastoreItem>
 </file>
--- a/Materials.pptx
+++ b/Materials.pptx
@@ -9,6 +9,8 @@
     <p:sldId id="257" r:id="rId6"/>
     <p:sldId id="258" r:id="rId7"/>
     <p:sldId id="259" r:id="rId8"/>
+    <p:sldId id="260" r:id="rId9"/>
+    <p:sldId id="261" r:id="rId10"/>
   </p:sldIdLst>
   <p:sldSz cx="12192000" cy="6858000"/>
   <p:notesSz cx="6858000" cy="9144000"/>
@@ -272,7 +274,7 @@
           <a:p>
             <a:fld id="{9236E18D-A30F-4D3C-BC15-86FA9E93A319}" type="datetimeFigureOut">
               <a:rPr kumimoji="1" lang="ja-JP" altLang="en-US" smtClean="0"/>
-              <a:t>2026/4/30</a:t>
+              <a:t>2026/5/2</a:t>
             </a:fld>
             <a:endParaRPr kumimoji="1" lang="ja-JP" altLang="en-US"/>
           </a:p>
@@ -472,7 +474,7 @@
           <a:p>
             <a:fld id="{9236E18D-A30F-4D3C-BC15-86FA9E93A319}" type="datetimeFigureOut">
               <a:rPr kumimoji="1" lang="ja-JP" altLang="en-US" smtClean="0"/>
-              <a:t>2026/4/30</a:t>
+              <a:t>2026/5/2</a:t>
             </a:fld>
             <a:endParaRPr kumimoji="1" lang="ja-JP" altLang="en-US"/>
           </a:p>
@@ -682,7 +684,7 @@
           <a:p>
             <a:fld id="{9236E18D-A30F-4D3C-BC15-86FA9E93A319}" type="datetimeFigureOut">
               <a:rPr kumimoji="1" lang="ja-JP" altLang="en-US" smtClean="0"/>
-              <a:t>2026/4/30</a:t>
+              <a:t>2026/5/2</a:t>
             </a:fld>
             <a:endParaRPr kumimoji="1" lang="ja-JP" altLang="en-US"/>
           </a:p>
@@ -882,7 +884,7 @@
           <a:p>
             <a:fld id="{9236E18D-A30F-4D3C-BC15-86FA9E93A319}" type="datetimeFigureOut">
               <a:rPr kumimoji="1" lang="ja-JP" altLang="en-US" smtClean="0"/>
-              <a:t>2026/4/30</a:t>
+              <a:t>2026/5/2</a:t>
             </a:fld>
             <a:endParaRPr kumimoji="1" lang="ja-JP" altLang="en-US"/>
           </a:p>
@@ -1158,7 +1160,7 @@
           <a:p>
             <a:fld id="{9236E18D-A30F-4D3C-BC15-86FA9E93A319}" type="datetimeFigureOut">
               <a:rPr kumimoji="1" lang="ja-JP" altLang="en-US" smtClean="0"/>
-              <a:t>2026/4/30</a:t>
+              <a:t>2026/5/2</a:t>
             </a:fld>
             <a:endParaRPr kumimoji="1" lang="ja-JP" altLang="en-US"/>
           </a:p>
@@ -1426,7 +1428,7 @@
           <a:p>
             <a:fld id="{9236E18D-A30F-4D3C-BC15-86FA9E93A319}" type="datetimeFigureOut">
               <a:rPr kumimoji="1" lang="ja-JP" altLang="en-US" smtClean="0"/>
-              <a:t>2026/4/30</a:t>
+              <a:t>2026/5/2</a:t>
             </a:fld>
             <a:endParaRPr kumimoji="1" lang="ja-JP" altLang="en-US"/>
           </a:p>
@@ -1841,7 +1843,7 @@
           <a:p>
             <a:fld id="{9236E18D-A30F-4D3C-BC15-86FA9E93A319}" type="datetimeFigureOut">
               <a:rPr kumimoji="1" lang="ja-JP" altLang="en-US" smtClean="0"/>
-              <a:t>2026/4/30</a:t>
+              <a:t>2026/5/2</a:t>
             </a:fld>
             <a:endParaRPr kumimoji="1" lang="ja-JP" altLang="en-US"/>
           </a:p>
@@ -1983,7 +1985,7 @@
           <a:p>
             <a:fld id="{9236E18D-A30F-4D3C-BC15-86FA9E93A319}" type="datetimeFigureOut">
               <a:rPr kumimoji="1" lang="ja-JP" altLang="en-US" smtClean="0"/>
-              <a:t>2026/4/30</a:t>
+              <a:t>2026/5/2</a:t>
             </a:fld>
             <a:endParaRPr kumimoji="1" lang="ja-JP" altLang="en-US"/>
           </a:p>
@@ -2096,7 +2098,7 @@
           <a:p>
             <a:fld id="{9236E18D-A30F-4D3C-BC15-86FA9E93A319}" type="datetimeFigureOut">
               <a:rPr kumimoji="1" lang="ja-JP" altLang="en-US" smtClean="0"/>
-              <a:t>2026/4/30</a:t>
+              <a:t>2026/5/2</a:t>
             </a:fld>
             <a:endParaRPr kumimoji="1" lang="ja-JP" altLang="en-US"/>
           </a:p>
@@ -2409,7 +2411,7 @@
           <a:p>
             <a:fld id="{9236E18D-A30F-4D3C-BC15-86FA9E93A319}" type="datetimeFigureOut">
               <a:rPr kumimoji="1" lang="ja-JP" altLang="en-US" smtClean="0"/>
-              <a:t>2026/4/30</a:t>
+              <a:t>2026/5/2</a:t>
             </a:fld>
             <a:endParaRPr kumimoji="1" lang="ja-JP" altLang="en-US"/>
           </a:p>
@@ -2698,7 +2700,7 @@
           <a:p>
             <a:fld id="{9236E18D-A30F-4D3C-BC15-86FA9E93A319}" type="datetimeFigureOut">
               <a:rPr kumimoji="1" lang="ja-JP" altLang="en-US" smtClean="0"/>
-              <a:t>2026/4/30</a:t>
+              <a:t>2026/5/2</a:t>
             </a:fld>
             <a:endParaRPr kumimoji="1" lang="ja-JP" altLang="en-US"/>
           </a:p>
@@ -2941,7 +2943,7 @@
           <a:p>
             <a:fld id="{9236E18D-A30F-4D3C-BC15-86FA9E93A319}" type="datetimeFigureOut">
               <a:rPr kumimoji="1" lang="ja-JP" altLang="en-US" smtClean="0"/>
-              <a:t>2026/4/30</a:t>
+              <a:t>2026/5/2</a:t>
             </a:fld>
             <a:endParaRPr kumimoji="1" lang="ja-JP" altLang="en-US"/>
           </a:p>
@@ -7591,6 +7593,225 @@
 </p:sld>
 </file>
 
+<file path=ppt/slides/slide5.xml><?xml version="1.0" encoding="utf-8"?>
+<p:sld xmlns:a="http://schemas.openxmlformats.org/drawingml/2006/main" xmlns:r="http://schemas.openxmlformats.org/officeDocument/2006/relationships" xmlns:p="http://schemas.openxmlformats.org/presentationml/2006/main">
+  <p:cSld>
+    <p:spTree>
+      <p:nvGrpSpPr>
+        <p:cNvPr id="1" name=""/>
+        <p:cNvGrpSpPr/>
+        <p:nvPr/>
+      </p:nvGrpSpPr>
+      <p:grpSpPr>
+        <a:xfrm>
+          <a:off x="0" y="0"/>
+          <a:ext cx="0" cy="0"/>
+          <a:chOff x="0" y="0"/>
+          <a:chExt cx="0" cy="0"/>
+        </a:xfrm>
+      </p:grpSpPr>
+      <p:pic>
+        <p:nvPicPr>
+          <p:cNvPr id="5" name="Picture 4">
+            <a:extLst>
+              <a:ext uri="{FF2B5EF4-FFF2-40B4-BE49-F238E27FC236}">
+                <a16:creationId xmlns:a16="http://schemas.microsoft.com/office/drawing/2014/main" id="{1006BB5F-6D76-3735-F631-64DB3A86CFBC}"/>
+              </a:ext>
+            </a:extLst>
+          </p:cNvPr>
+          <p:cNvPicPr>
+            <a:picLocks noChangeAspect="1"/>
+          </p:cNvPicPr>
+          <p:nvPr/>
+        </p:nvPicPr>
+        <p:blipFill>
+          <a:blip r:embed="rId2"/>
+          <a:stretch>
+            <a:fillRect/>
+          </a:stretch>
+        </p:blipFill>
+        <p:spPr>
+          <a:xfrm>
+            <a:off x="6096000" y="2792358"/>
+            <a:ext cx="5696745" cy="3134162"/>
+          </a:xfrm>
+          <a:prstGeom prst="rect">
+            <a:avLst/>
+          </a:prstGeom>
+        </p:spPr>
+      </p:pic>
+      <p:pic>
+        <p:nvPicPr>
+          <p:cNvPr id="7" name="Picture 6">
+            <a:extLst>
+              <a:ext uri="{FF2B5EF4-FFF2-40B4-BE49-F238E27FC236}">
+                <a16:creationId xmlns:a16="http://schemas.microsoft.com/office/drawing/2014/main" id="{BA3767D0-4433-CD71-E66E-E5B50F3EB88D}"/>
+              </a:ext>
+            </a:extLst>
+          </p:cNvPr>
+          <p:cNvPicPr>
+            <a:picLocks noChangeAspect="1"/>
+          </p:cNvPicPr>
+          <p:nvPr/>
+        </p:nvPicPr>
+        <p:blipFill>
+          <a:blip r:embed="rId3"/>
+          <a:stretch>
+            <a:fillRect/>
+          </a:stretch>
+        </p:blipFill>
+        <p:spPr>
+          <a:xfrm>
+            <a:off x="235425" y="2792358"/>
+            <a:ext cx="5860575" cy="2843180"/>
+          </a:xfrm>
+          <a:prstGeom prst="rect">
+            <a:avLst/>
+          </a:prstGeom>
+        </p:spPr>
+      </p:pic>
+      <p:pic>
+        <p:nvPicPr>
+          <p:cNvPr id="9" name="Picture 8">
+            <a:extLst>
+              <a:ext uri="{FF2B5EF4-FFF2-40B4-BE49-F238E27FC236}">
+                <a16:creationId xmlns:a16="http://schemas.microsoft.com/office/drawing/2014/main" id="{57D4E51C-9E36-37CB-B5B6-49229FB8522E}"/>
+              </a:ext>
+            </a:extLst>
+          </p:cNvPr>
+          <p:cNvPicPr>
+            <a:picLocks noChangeAspect="1"/>
+          </p:cNvPicPr>
+          <p:nvPr/>
+        </p:nvPicPr>
+        <p:blipFill>
+          <a:blip r:embed="rId4"/>
+          <a:stretch>
+            <a:fillRect/>
+          </a:stretch>
+        </p:blipFill>
+        <p:spPr>
+          <a:xfrm>
+            <a:off x="235425" y="-101047"/>
+            <a:ext cx="11557320" cy="2893405"/>
+          </a:xfrm>
+          <a:prstGeom prst="rect">
+            <a:avLst/>
+          </a:prstGeom>
+        </p:spPr>
+      </p:pic>
+    </p:spTree>
+    <p:extLst>
+      <p:ext uri="{BB962C8B-B14F-4D97-AF65-F5344CB8AC3E}">
+        <p14:creationId xmlns:p14="http://schemas.microsoft.com/office/powerpoint/2010/main" val="1097254049"/>
+      </p:ext>
+    </p:extLst>
+  </p:cSld>
+  <p:clrMapOvr>
+    <a:masterClrMapping/>
+  </p:clrMapOvr>
+</p:sld>
+</file>
+
+<file path=ppt/slides/slide6.xml><?xml version="1.0" encoding="utf-8"?>
+<p:sld xmlns:a="http://schemas.openxmlformats.org/drawingml/2006/main" xmlns:r="http://schemas.openxmlformats.org/officeDocument/2006/relationships" xmlns:p="http://schemas.openxmlformats.org/presentationml/2006/main">
+  <p:cSld>
+    <p:spTree>
+      <p:nvGrpSpPr>
+        <p:cNvPr id="1" name=""/>
+        <p:cNvGrpSpPr/>
+        <p:nvPr/>
+      </p:nvGrpSpPr>
+      <p:grpSpPr>
+        <a:xfrm>
+          <a:off x="0" y="0"/>
+          <a:ext cx="0" cy="0"/>
+          <a:chOff x="0" y="0"/>
+          <a:chExt cx="0" cy="0"/>
+        </a:xfrm>
+      </p:grpSpPr>
+      <p:pic>
+        <p:nvPicPr>
+          <p:cNvPr id="5" name="Picture 4">
+            <a:extLst>
+              <a:ext uri="{FF2B5EF4-FFF2-40B4-BE49-F238E27FC236}">
+                <a16:creationId xmlns:a16="http://schemas.microsoft.com/office/drawing/2014/main" id="{4DA489AF-E837-9982-E5AC-FB7663DA356F}"/>
+              </a:ext>
+            </a:extLst>
+          </p:cNvPr>
+          <p:cNvPicPr>
+            <a:picLocks noChangeAspect="1"/>
+          </p:cNvPicPr>
+          <p:nvPr/>
+        </p:nvPicPr>
+        <p:blipFill>
+          <a:blip r:embed="rId2"/>
+          <a:stretch>
+            <a:fillRect/>
+          </a:stretch>
+        </p:blipFill>
+        <p:spPr>
+          <a:xfrm>
+            <a:off x="0" y="1709178"/>
+            <a:ext cx="12192000" cy="3439643"/>
+          </a:xfrm>
+          <a:prstGeom prst="rect">
+            <a:avLst/>
+          </a:prstGeom>
+        </p:spPr>
+      </p:pic>
+      <p:sp>
+        <p:nvSpPr>
+          <p:cNvPr id="7" name="TextBox 6">
+            <a:extLst>
+              <a:ext uri="{FF2B5EF4-FFF2-40B4-BE49-F238E27FC236}">
+                <a16:creationId xmlns:a16="http://schemas.microsoft.com/office/drawing/2014/main" id="{35A9D52A-AF4E-1080-2C81-0AA569F608D2}"/>
+              </a:ext>
+            </a:extLst>
+          </p:cNvPr>
+          <p:cNvSpPr txBox="1"/>
+          <p:nvPr/>
+        </p:nvSpPr>
+        <p:spPr>
+          <a:xfrm>
+            <a:off x="184484" y="1339846"/>
+            <a:ext cx="6162472" cy="369332"/>
+          </a:xfrm>
+          <a:prstGeom prst="rect">
+            <a:avLst/>
+          </a:prstGeom>
+          <a:noFill/>
+        </p:spPr>
+        <p:txBody>
+          <a:bodyPr wrap="square">
+            <a:spAutoFit/>
+          </a:bodyPr>
+          <a:lstStyle/>
+          <a:p>
+            <a:r>
+              <a:rPr lang="en-US" altLang="ja-JP" dirty="0"/>
+              <a:t>400G-ZR/ZR+</a:t>
+            </a:r>
+            <a:r>
+              <a:rPr lang="ja-JP" altLang="en-US" dirty="0"/>
+              <a:t>とは？</a:t>
+            </a:r>
+          </a:p>
+        </p:txBody>
+      </p:sp>
+    </p:spTree>
+    <p:extLst>
+      <p:ext uri="{BB962C8B-B14F-4D97-AF65-F5344CB8AC3E}">
+        <p14:creationId xmlns:p14="http://schemas.microsoft.com/office/powerpoint/2010/main" val="1916245107"/>
+      </p:ext>
+    </p:extLst>
+  </p:cSld>
+  <p:clrMapOvr>
+    <a:masterClrMapping/>
+  </p:clrMapOvr>
+</p:sld>
+</file>
+
 <file path=ppt/theme/theme1.xml><?xml version="1.0" encoding="utf-8"?>
 <a:theme xmlns:a="http://schemas.openxmlformats.org/drawingml/2006/main" name="Office Theme">
   <a:themeElements>
@@ -7915,6 +8136,15 @@
 </file>
 
 <file path=customXml/item2.xml><?xml version="1.0" encoding="utf-8"?>
+<?mso-contentType ?>
+<FormTemplates xmlns="http://schemas.microsoft.com/sharepoint/v3/contenttype/forms">
+  <Display>DocumentLibraryForm</Display>
+  <Edit>DocumentLibraryForm</Edit>
+  <New>DocumentLibraryForm</New>
+</FormTemplates>
+</file>
+
+<file path=customXml/item3.xml><?xml version="1.0" encoding="utf-8"?>
 <ct:contentTypeSchema xmlns:ct="http://schemas.microsoft.com/office/2006/metadata/contentType" xmlns:ma="http://schemas.microsoft.com/office/2006/metadata/properties/metaAttributes" ct:_="" ma:_="" ma:contentTypeName="ドキュメント" ma:contentTypeID="0x010100D291828BE931164DA279E7DB37510E8B" ma:contentTypeVersion="12" ma:contentTypeDescription="新しいドキュメントを作成します。" ma:contentTypeScope="" ma:versionID="d40e79753e265535ebdef0a9a1630dbe">
   <xsd:schema xmlns:xsd="http://www.w3.org/2001/XMLSchema" xmlns:xs="http://www.w3.org/2001/XMLSchema" xmlns:p="http://schemas.microsoft.com/office/2006/metadata/properties" xmlns:ns3="e5fea337-426f-4878-aaa1-6cc4dbed00d3" targetNamespace="http://schemas.microsoft.com/office/2006/metadata/properties" ma:root="true" ma:fieldsID="909ec013045a4ae227a46cef79b1603d" ns3:_="">
     <xsd:import namespace="e5fea337-426f-4878-aaa1-6cc4dbed00d3"/>
@@ -8108,15 +8338,6 @@
 </ct:contentTypeSchema>
 </file>
 
-<file path=customXml/item3.xml><?xml version="1.0" encoding="utf-8"?>
-<?mso-contentType ?>
-<FormTemplates xmlns="http://schemas.microsoft.com/sharepoint/v3/contenttype/forms">
-  <Display>DocumentLibraryForm</Display>
-  <Edit>DocumentLibraryForm</Edit>
-  <New>DocumentLibraryForm</New>
-</FormTemplates>
-</file>
-
 <file path=customXml/itemProps1.xml><?xml version="1.0" encoding="utf-8"?>
 <ds:datastoreItem xmlns:ds="http://schemas.openxmlformats.org/officeDocument/2006/customXml" ds:itemID="{E690C700-0B54-4769-9477-9FE646BEDBDF}">
   <ds:schemaRefs>
@@ -8134,6 +8355,14 @@
 </file>
 
 <file path=customXml/itemProps2.xml><?xml version="1.0" encoding="utf-8"?>
+<ds:datastoreItem xmlns:ds="http://schemas.openxmlformats.org/officeDocument/2006/customXml" ds:itemID="{EBB85C3E-FFAD-4A75-A769-4B97E54A903C}">
+  <ds:schemaRefs>
+    <ds:schemaRef ds:uri="http://schemas.microsoft.com/sharepoint/v3/contenttype/forms"/>
+  </ds:schemaRefs>
+</ds:datastoreItem>
+</file>
+
+<file path=customXml/itemProps3.xml><?xml version="1.0" encoding="utf-8"?>
 <ds:datastoreItem xmlns:ds="http://schemas.openxmlformats.org/officeDocument/2006/customXml" ds:itemID="{6231A16C-3E0A-4893-9CB3-DA6770BA5700}">
   <ds:schemaRefs>
     <ds:schemaRef ds:uri="http://schemas.microsoft.com/office/2006/metadata/contentType"/>
@@ -8149,12 +8378,4 @@
     <ds:schemaRef ds:uri="http://schemas.microsoft.com/internal/obd"/>
   </ds:schemaRefs>
 </ds:datastoreItem>
-</file>
-
-<file path=customXml/itemProps3.xml><?xml version="1.0" encoding="utf-8"?>
-<ds:datastoreItem xmlns:ds="http://schemas.openxmlformats.org/officeDocument/2006/customXml" ds:itemID="{EBB85C3E-FFAD-4A75-A769-4B97E54A903C}">
-  <ds:schemaRefs>
-    <ds:schemaRef ds:uri="http://schemas.microsoft.com/sharepoint/v3/contenttype/forms"/>
-  </ds:schemaRefs>
-</ds:datastoreItem>
 </file>
--- a/Materials.pptx
+++ b/Materials.pptx
@@ -118,9 +118,341 @@
 <file path=ppt/revisionInfo.xml><?xml version="1.0" encoding="utf-8"?>
 <p1510:revInfo xmlns:a="http://schemas.openxmlformats.org/drawingml/2006/main" xmlns:r="http://schemas.openxmlformats.org/officeDocument/2006/relationships" xmlns:p1510="http://schemas.microsoft.com/office/powerpoint/2015/10/main">
   <p1510:revLst>
-    <p1510:client id="{4D29ADE8-87A0-47F3-AF9B-6AE0BEA23B07}" v="5" dt="2026-04-26T07:06:41.845"/>
+    <p1510:client id="{A64435B3-68C8-4D15-ABC2-F6D6B7048934}" v="13" dt="2026-05-06T11:41:36.732"/>
   </p1510:revLst>
 </p1510:revInfo>
+</file>
+
+<file path=ppt/changesInfos/changesInfo1.xml><?xml version="1.0" encoding="utf-8"?>
+<pc:chgInfo xmlns:a="http://schemas.openxmlformats.org/drawingml/2006/main" xmlns:r="http://schemas.openxmlformats.org/officeDocument/2006/relationships" xmlns:ac="http://schemas.microsoft.com/office/drawing/2013/main/command" xmlns:pc="http://schemas.microsoft.com/office/powerpoint/2013/main/command">
+  <pc:docChgLst>
+    <pc:chgData name="全 香玉" userId="1f3450e5-81b9-4f7a-82d7-841c32c029e0" providerId="ADAL" clId="{670531AC-1667-4F97-B1A6-5D38F8A44A79}"/>
+    <pc:docChg chg="undo custSel addSld delSld modSld">
+      <pc:chgData name="全 香玉" userId="1f3450e5-81b9-4f7a-82d7-841c32c029e0" providerId="ADAL" clId="{670531AC-1667-4F97-B1A6-5D38F8A44A79}" dt="2026-05-06T11:47:27.152" v="60" actId="478"/>
+      <pc:docMkLst>
+        <pc:docMk/>
+      </pc:docMkLst>
+      <pc:sldChg chg="addSp delSp modSp mod">
+        <pc:chgData name="全 香玉" userId="1f3450e5-81b9-4f7a-82d7-841c32c029e0" providerId="ADAL" clId="{670531AC-1667-4F97-B1A6-5D38F8A44A79}" dt="2026-05-06T11:47:27.152" v="60" actId="478"/>
+        <pc:sldMkLst>
+          <pc:docMk/>
+          <pc:sldMk cId="1254327464" sldId="258"/>
+        </pc:sldMkLst>
+        <pc:picChg chg="add del mod">
+          <ac:chgData name="全 香玉" userId="1f3450e5-81b9-4f7a-82d7-841c32c029e0" providerId="ADAL" clId="{670531AC-1667-4F97-B1A6-5D38F8A44A79}" dt="2026-05-06T11:47:27.152" v="60" actId="478"/>
+          <ac:picMkLst>
+            <pc:docMk/>
+            <pc:sldMk cId="1254327464" sldId="258"/>
+            <ac:picMk id="7" creationId="{9B6E3BCE-9622-529C-273F-A77BDB6E3367}"/>
+          </ac:picMkLst>
+        </pc:picChg>
+      </pc:sldChg>
+      <pc:sldChg chg="addSp delSp modSp add del mod">
+        <pc:chgData name="全 香玉" userId="1f3450e5-81b9-4f7a-82d7-841c32c029e0" providerId="ADAL" clId="{670531AC-1667-4F97-B1A6-5D38F8A44A79}" dt="2026-05-06T11:44:40.349" v="57" actId="47"/>
+        <pc:sldMkLst>
+          <pc:docMk/>
+          <pc:sldMk cId="3870240619" sldId="260"/>
+        </pc:sldMkLst>
+        <pc:spChg chg="del">
+          <ac:chgData name="全 香玉" userId="1f3450e5-81b9-4f7a-82d7-841c32c029e0" providerId="ADAL" clId="{670531AC-1667-4F97-B1A6-5D38F8A44A79}" dt="2026-05-06T11:30:31.047" v="3" actId="478"/>
+          <ac:spMkLst>
+            <pc:docMk/>
+            <pc:sldMk cId="3870240619" sldId="260"/>
+            <ac:spMk id="14" creationId="{C568D860-510A-FD78-7D09-9A15486673C1}"/>
+          </ac:spMkLst>
+        </pc:spChg>
+        <pc:spChg chg="del mod">
+          <ac:chgData name="全 香玉" userId="1f3450e5-81b9-4f7a-82d7-841c32c029e0" providerId="ADAL" clId="{670531AC-1667-4F97-B1A6-5D38F8A44A79}" dt="2026-05-06T11:32:08.162" v="20" actId="478"/>
+          <ac:spMkLst>
+            <pc:docMk/>
+            <pc:sldMk cId="3870240619" sldId="260"/>
+            <ac:spMk id="15" creationId="{B219E595-2709-6087-492D-7B5E662EBB6D}"/>
+          </ac:spMkLst>
+        </pc:spChg>
+        <pc:spChg chg="del">
+          <ac:chgData name="全 香玉" userId="1f3450e5-81b9-4f7a-82d7-841c32c029e0" providerId="ADAL" clId="{670531AC-1667-4F97-B1A6-5D38F8A44A79}" dt="2026-05-06T11:30:37.294" v="7" actId="478"/>
+          <ac:spMkLst>
+            <pc:docMk/>
+            <pc:sldMk cId="3870240619" sldId="260"/>
+            <ac:spMk id="16" creationId="{C5A675F1-68DA-F304-FB09-F04E21C3F943}"/>
+          </ac:spMkLst>
+        </pc:spChg>
+        <pc:spChg chg="del">
+          <ac:chgData name="全 香玉" userId="1f3450e5-81b9-4f7a-82d7-841c32c029e0" providerId="ADAL" clId="{670531AC-1667-4F97-B1A6-5D38F8A44A79}" dt="2026-05-06T11:30:36.138" v="6" actId="478"/>
+          <ac:spMkLst>
+            <pc:docMk/>
+            <pc:sldMk cId="3870240619" sldId="260"/>
+            <ac:spMk id="17" creationId="{F9D14970-0327-056E-B167-F49374C678F5}"/>
+          </ac:spMkLst>
+        </pc:spChg>
+        <pc:spChg chg="del mod">
+          <ac:chgData name="全 香玉" userId="1f3450e5-81b9-4f7a-82d7-841c32c029e0" providerId="ADAL" clId="{670531AC-1667-4F97-B1A6-5D38F8A44A79}" dt="2026-05-06T11:30:34.018" v="5" actId="478"/>
+          <ac:spMkLst>
+            <pc:docMk/>
+            <pc:sldMk cId="3870240619" sldId="260"/>
+            <ac:spMk id="18" creationId="{67CF337B-0095-93F5-4CF4-BCD99D37990B}"/>
+          </ac:spMkLst>
+        </pc:spChg>
+        <pc:spChg chg="del">
+          <ac:chgData name="全 香玉" userId="1f3450e5-81b9-4f7a-82d7-841c32c029e0" providerId="ADAL" clId="{670531AC-1667-4F97-B1A6-5D38F8A44A79}" dt="2026-05-06T11:30:41.579" v="10" actId="478"/>
+          <ac:spMkLst>
+            <pc:docMk/>
+            <pc:sldMk cId="3870240619" sldId="260"/>
+            <ac:spMk id="19" creationId="{C18EF50A-0AFB-CF80-B49F-217C91D6A0C4}"/>
+          </ac:spMkLst>
+        </pc:spChg>
+        <pc:spChg chg="del">
+          <ac:chgData name="全 香玉" userId="1f3450e5-81b9-4f7a-82d7-841c32c029e0" providerId="ADAL" clId="{670531AC-1667-4F97-B1A6-5D38F8A44A79}" dt="2026-05-06T11:30:43.513" v="11" actId="478"/>
+          <ac:spMkLst>
+            <pc:docMk/>
+            <pc:sldMk cId="3870240619" sldId="260"/>
+            <ac:spMk id="35" creationId="{54E1869E-A874-1788-4418-809793956D0B}"/>
+          </ac:spMkLst>
+        </pc:spChg>
+        <pc:spChg chg="del">
+          <ac:chgData name="全 香玉" userId="1f3450e5-81b9-4f7a-82d7-841c32c029e0" providerId="ADAL" clId="{670531AC-1667-4F97-B1A6-5D38F8A44A79}" dt="2026-05-06T11:30:45.080" v="12" actId="478"/>
+          <ac:spMkLst>
+            <pc:docMk/>
+            <pc:sldMk cId="3870240619" sldId="260"/>
+            <ac:spMk id="36" creationId="{7E775FDD-EC51-FDC6-B234-4D8771B73524}"/>
+          </ac:spMkLst>
+        </pc:spChg>
+        <pc:spChg chg="mod">
+          <ac:chgData name="全 香玉" userId="1f3450e5-81b9-4f7a-82d7-841c32c029e0" providerId="ADAL" clId="{670531AC-1667-4F97-B1A6-5D38F8A44A79}" dt="2026-05-06T11:32:13.745" v="22"/>
+          <ac:spMkLst>
+            <pc:docMk/>
+            <pc:sldMk cId="3870240619" sldId="260"/>
+            <ac:spMk id="39" creationId="{DF61740B-C9C6-B40D-07CB-2DFFFF7841F8}"/>
+          </ac:spMkLst>
+        </pc:spChg>
+        <pc:spChg chg="mod">
+          <ac:chgData name="全 香玉" userId="1f3450e5-81b9-4f7a-82d7-841c32c029e0" providerId="ADAL" clId="{670531AC-1667-4F97-B1A6-5D38F8A44A79}" dt="2026-05-06T11:32:13.745" v="22"/>
+          <ac:spMkLst>
+            <pc:docMk/>
+            <pc:sldMk cId="3870240619" sldId="260"/>
+            <ac:spMk id="42" creationId="{825673DA-6840-F73D-DB96-0CC33211F43A}"/>
+          </ac:spMkLst>
+        </pc:spChg>
+        <pc:spChg chg="mod">
+          <ac:chgData name="全 香玉" userId="1f3450e5-81b9-4f7a-82d7-841c32c029e0" providerId="ADAL" clId="{670531AC-1667-4F97-B1A6-5D38F8A44A79}" dt="2026-05-06T11:32:13.745" v="22"/>
+          <ac:spMkLst>
+            <pc:docMk/>
+            <pc:sldMk cId="3870240619" sldId="260"/>
+            <ac:spMk id="43" creationId="{A54E7C46-9AF5-0A77-BF0A-C85A1E0AA85C}"/>
+          </ac:spMkLst>
+        </pc:spChg>
+        <pc:spChg chg="mod">
+          <ac:chgData name="全 香玉" userId="1f3450e5-81b9-4f7a-82d7-841c32c029e0" providerId="ADAL" clId="{670531AC-1667-4F97-B1A6-5D38F8A44A79}" dt="2026-05-06T11:32:13.745" v="22"/>
+          <ac:spMkLst>
+            <pc:docMk/>
+            <pc:sldMk cId="3870240619" sldId="260"/>
+            <ac:spMk id="44" creationId="{8AE9C6D7-B33B-BB1B-5E88-7715B35C0678}"/>
+          </ac:spMkLst>
+        </pc:spChg>
+        <pc:spChg chg="del">
+          <ac:chgData name="全 香玉" userId="1f3450e5-81b9-4f7a-82d7-841c32c029e0" providerId="ADAL" clId="{670531AC-1667-4F97-B1A6-5D38F8A44A79}" dt="2026-05-06T11:30:39.712" v="9" actId="478"/>
+          <ac:spMkLst>
+            <pc:docMk/>
+            <pc:sldMk cId="3870240619" sldId="260"/>
+            <ac:spMk id="46" creationId="{D8B112D1-A382-B8A2-98F8-7DB90D4A20C0}"/>
+          </ac:spMkLst>
+        </pc:spChg>
+        <pc:spChg chg="del mod">
+          <ac:chgData name="全 香玉" userId="1f3450e5-81b9-4f7a-82d7-841c32c029e0" providerId="ADAL" clId="{670531AC-1667-4F97-B1A6-5D38F8A44A79}" dt="2026-05-06T11:32:10.024" v="21" actId="478"/>
+          <ac:spMkLst>
+            <pc:docMk/>
+            <pc:sldMk cId="3870240619" sldId="260"/>
+            <ac:spMk id="47" creationId="{6396A514-67E6-EC53-3D93-F1AC7DBDB1F9}"/>
+          </ac:spMkLst>
+        </pc:spChg>
+        <pc:spChg chg="mod">
+          <ac:chgData name="全 香玉" userId="1f3450e5-81b9-4f7a-82d7-841c32c029e0" providerId="ADAL" clId="{670531AC-1667-4F97-B1A6-5D38F8A44A79}" dt="2026-05-06T11:33:31.838" v="27" actId="688"/>
+          <ac:spMkLst>
+            <pc:docMk/>
+            <pc:sldMk cId="3870240619" sldId="260"/>
+            <ac:spMk id="48" creationId="{C046D9A0-AC34-065A-1FEE-7347B646EA12}"/>
+          </ac:spMkLst>
+        </pc:spChg>
+        <pc:spChg chg="mod">
+          <ac:chgData name="全 香玉" userId="1f3450e5-81b9-4f7a-82d7-841c32c029e0" providerId="ADAL" clId="{670531AC-1667-4F97-B1A6-5D38F8A44A79}" dt="2026-05-06T11:33:41.162" v="29" actId="1076"/>
+          <ac:spMkLst>
+            <pc:docMk/>
+            <pc:sldMk cId="3870240619" sldId="260"/>
+            <ac:spMk id="49" creationId="{40EE9818-52B2-8C51-65EB-938D62C92316}"/>
+          </ac:spMkLst>
+        </pc:spChg>
+        <pc:spChg chg="mod">
+          <ac:chgData name="全 香玉" userId="1f3450e5-81b9-4f7a-82d7-841c32c029e0" providerId="ADAL" clId="{670531AC-1667-4F97-B1A6-5D38F8A44A79}" dt="2026-05-06T11:33:25.678" v="26" actId="688"/>
+          <ac:spMkLst>
+            <pc:docMk/>
+            <pc:sldMk cId="3870240619" sldId="260"/>
+            <ac:spMk id="50" creationId="{FCD51B2A-7DE9-CC8D-F8AF-6D2EB51D3476}"/>
+          </ac:spMkLst>
+        </pc:spChg>
+        <pc:spChg chg="mod">
+          <ac:chgData name="全 香玉" userId="1f3450e5-81b9-4f7a-82d7-841c32c029e0" providerId="ADAL" clId="{670531AC-1667-4F97-B1A6-5D38F8A44A79}" dt="2026-05-06T11:32:13.745" v="22"/>
+          <ac:spMkLst>
+            <pc:docMk/>
+            <pc:sldMk cId="3870240619" sldId="260"/>
+            <ac:spMk id="51" creationId="{704BB3B9-7046-C74C-EF61-9C6527BC2ECD}"/>
+          </ac:spMkLst>
+        </pc:spChg>
+        <pc:spChg chg="mod">
+          <ac:chgData name="全 香玉" userId="1f3450e5-81b9-4f7a-82d7-841c32c029e0" providerId="ADAL" clId="{670531AC-1667-4F97-B1A6-5D38F8A44A79}" dt="2026-05-06T11:32:13.745" v="22"/>
+          <ac:spMkLst>
+            <pc:docMk/>
+            <pc:sldMk cId="3870240619" sldId="260"/>
+            <ac:spMk id="53" creationId="{9F3AC2DA-0F3C-7FB0-443B-D37669457611}"/>
+          </ac:spMkLst>
+        </pc:spChg>
+        <pc:spChg chg="mod">
+          <ac:chgData name="全 香玉" userId="1f3450e5-81b9-4f7a-82d7-841c32c029e0" providerId="ADAL" clId="{670531AC-1667-4F97-B1A6-5D38F8A44A79}" dt="2026-05-06T11:32:13.745" v="22"/>
+          <ac:spMkLst>
+            <pc:docMk/>
+            <pc:sldMk cId="3870240619" sldId="260"/>
+            <ac:spMk id="54" creationId="{88355B9E-76F7-706A-0DE1-B266E16AC9F9}"/>
+          </ac:spMkLst>
+        </pc:spChg>
+        <pc:grpChg chg="add mod">
+          <ac:chgData name="全 香玉" userId="1f3450e5-81b9-4f7a-82d7-841c32c029e0" providerId="ADAL" clId="{670531AC-1667-4F97-B1A6-5D38F8A44A79}" dt="2026-05-06T11:32:05.348" v="19" actId="164"/>
+          <ac:grpSpMkLst>
+            <pc:docMk/>
+            <pc:sldMk cId="3870240619" sldId="260"/>
+            <ac:grpSpMk id="10" creationId="{8CF6A722-FE30-ECF0-DF3E-F4A00C047FE0}"/>
+          </ac:grpSpMkLst>
+        </pc:grpChg>
+        <pc:grpChg chg="mod">
+          <ac:chgData name="全 香玉" userId="1f3450e5-81b9-4f7a-82d7-841c32c029e0" providerId="ADAL" clId="{670531AC-1667-4F97-B1A6-5D38F8A44A79}" dt="2026-05-06T11:32:41.429" v="25" actId="1076"/>
+          <ac:grpSpMkLst>
+            <pc:docMk/>
+            <pc:sldMk cId="3870240619" sldId="260"/>
+            <ac:grpSpMk id="21" creationId="{148A3BE5-18F0-090C-EDFC-43336A9B99CA}"/>
+          </ac:grpSpMkLst>
+        </pc:grpChg>
+        <pc:grpChg chg="mod">
+          <ac:chgData name="全 香玉" userId="1f3450e5-81b9-4f7a-82d7-841c32c029e0" providerId="ADAL" clId="{670531AC-1667-4F97-B1A6-5D38F8A44A79}" dt="2026-05-06T11:32:05.348" v="19" actId="164"/>
+          <ac:grpSpMkLst>
+            <pc:docMk/>
+            <pc:sldMk cId="3870240619" sldId="260"/>
+            <ac:grpSpMk id="34" creationId="{AFC9DB36-FF96-6FB3-EABE-DCFB30110D8A}"/>
+          </ac:grpSpMkLst>
+        </pc:grpChg>
+        <pc:cxnChg chg="add del mod">
+          <ac:chgData name="全 香玉" userId="1f3450e5-81b9-4f7a-82d7-841c32c029e0" providerId="ADAL" clId="{670531AC-1667-4F97-B1A6-5D38F8A44A79}" dt="2026-05-06T11:31:44.392" v="18" actId="478"/>
+          <ac:cxnSpMkLst>
+            <pc:docMk/>
+            <pc:sldMk cId="3870240619" sldId="260"/>
+            <ac:cxnSpMk id="2" creationId="{E52C86DB-7F50-725E-838B-A0D381CDD78C}"/>
+          </ac:cxnSpMkLst>
+        </pc:cxnChg>
+        <pc:cxnChg chg="mod">
+          <ac:chgData name="全 香玉" userId="1f3450e5-81b9-4f7a-82d7-841c32c029e0" providerId="ADAL" clId="{670531AC-1667-4F97-B1A6-5D38F8A44A79}" dt="2026-05-06T11:32:05.348" v="19" actId="164"/>
+          <ac:cxnSpMkLst>
+            <pc:docMk/>
+            <pc:sldMk cId="3870240619" sldId="260"/>
+            <ac:cxnSpMk id="3" creationId="{541E8594-E201-3832-00D6-E37C86D69844}"/>
+          </ac:cxnSpMkLst>
+        </pc:cxnChg>
+        <pc:cxnChg chg="mod">
+          <ac:chgData name="全 香玉" userId="1f3450e5-81b9-4f7a-82d7-841c32c029e0" providerId="ADAL" clId="{670531AC-1667-4F97-B1A6-5D38F8A44A79}" dt="2026-05-06T11:32:05.348" v="19" actId="164"/>
+          <ac:cxnSpMkLst>
+            <pc:docMk/>
+            <pc:sldMk cId="3870240619" sldId="260"/>
+            <ac:cxnSpMk id="6" creationId="{8BA85B71-EA80-625E-8657-7FE99C56D1FA}"/>
+          </ac:cxnSpMkLst>
+        </pc:cxnChg>
+        <pc:cxnChg chg="mod">
+          <ac:chgData name="全 香玉" userId="1f3450e5-81b9-4f7a-82d7-841c32c029e0" providerId="ADAL" clId="{670531AC-1667-4F97-B1A6-5D38F8A44A79}" dt="2026-05-06T11:32:05.348" v="19" actId="164"/>
+          <ac:cxnSpMkLst>
+            <pc:docMk/>
+            <pc:sldMk cId="3870240619" sldId="260"/>
+            <ac:cxnSpMk id="25" creationId="{1A114D7A-464D-451D-DE43-CAB040CE4194}"/>
+          </ac:cxnSpMkLst>
+        </pc:cxnChg>
+        <pc:cxnChg chg="add del mod">
+          <ac:chgData name="全 香玉" userId="1f3450e5-81b9-4f7a-82d7-841c32c029e0" providerId="ADAL" clId="{670531AC-1667-4F97-B1A6-5D38F8A44A79}" dt="2026-05-06T11:32:05.348" v="19" actId="164"/>
+          <ac:cxnSpMkLst>
+            <pc:docMk/>
+            <pc:sldMk cId="3870240619" sldId="260"/>
+            <ac:cxnSpMk id="40" creationId="{27F99BF7-D736-0BC4-2D1D-422A226AD406}"/>
+          </ac:cxnSpMkLst>
+        </pc:cxnChg>
+        <pc:cxnChg chg="del">
+          <ac:chgData name="全 香玉" userId="1f3450e5-81b9-4f7a-82d7-841c32c029e0" providerId="ADAL" clId="{670531AC-1667-4F97-B1A6-5D38F8A44A79}" dt="2026-05-06T11:30:38.656" v="8" actId="478"/>
+          <ac:cxnSpMkLst>
+            <pc:docMk/>
+            <pc:sldMk cId="3870240619" sldId="260"/>
+            <ac:cxnSpMk id="41" creationId="{4E8C6466-9E57-9B5A-E614-F96888C53258}"/>
+          </ac:cxnSpMkLst>
+        </pc:cxnChg>
+        <pc:cxnChg chg="add mod">
+          <ac:chgData name="全 香玉" userId="1f3450e5-81b9-4f7a-82d7-841c32c029e0" providerId="ADAL" clId="{670531AC-1667-4F97-B1A6-5D38F8A44A79}" dt="2026-05-06T11:36:30.307" v="32" actId="1076"/>
+          <ac:cxnSpMkLst>
+            <pc:docMk/>
+            <pc:sldMk cId="3870240619" sldId="260"/>
+            <ac:cxnSpMk id="56" creationId="{2C770890-CB21-F539-9661-D6196A0D8DB8}"/>
+          </ac:cxnSpMkLst>
+        </pc:cxnChg>
+        <pc:cxnChg chg="add del mod">
+          <ac:chgData name="全 香玉" userId="1f3450e5-81b9-4f7a-82d7-841c32c029e0" providerId="ADAL" clId="{670531AC-1667-4F97-B1A6-5D38F8A44A79}" dt="2026-05-06T11:40:31.617" v="53" actId="478"/>
+          <ac:cxnSpMkLst>
+            <pc:docMk/>
+            <pc:sldMk cId="3870240619" sldId="260"/>
+            <ac:cxnSpMk id="57" creationId="{294D0585-D7E5-6A54-755C-72D1F678792C}"/>
+          </ac:cxnSpMkLst>
+        </pc:cxnChg>
+        <pc:cxnChg chg="add del mod">
+          <ac:chgData name="全 香玉" userId="1f3450e5-81b9-4f7a-82d7-841c32c029e0" providerId="ADAL" clId="{670531AC-1667-4F97-B1A6-5D38F8A44A79}" dt="2026-05-06T11:40:31.617" v="53" actId="478"/>
+          <ac:cxnSpMkLst>
+            <pc:docMk/>
+            <pc:sldMk cId="3870240619" sldId="260"/>
+            <ac:cxnSpMk id="58" creationId="{46C52F5C-424D-4A0F-100A-C831A9A21BCA}"/>
+          </ac:cxnSpMkLst>
+        </pc:cxnChg>
+        <pc:cxnChg chg="add del mod">
+          <ac:chgData name="全 香玉" userId="1f3450e5-81b9-4f7a-82d7-841c32c029e0" providerId="ADAL" clId="{670531AC-1667-4F97-B1A6-5D38F8A44A79}" dt="2026-05-06T11:40:31.617" v="53" actId="478"/>
+          <ac:cxnSpMkLst>
+            <pc:docMk/>
+            <pc:sldMk cId="3870240619" sldId="260"/>
+            <ac:cxnSpMk id="61" creationId="{48D434D1-F532-291A-714B-9C539DDD9EA0}"/>
+          </ac:cxnSpMkLst>
+        </pc:cxnChg>
+        <pc:cxnChg chg="add del mod">
+          <ac:chgData name="全 香玉" userId="1f3450e5-81b9-4f7a-82d7-841c32c029e0" providerId="ADAL" clId="{670531AC-1667-4F97-B1A6-5D38F8A44A79}" dt="2026-05-06T11:40:31.617" v="53" actId="478"/>
+          <ac:cxnSpMkLst>
+            <pc:docMk/>
+            <pc:sldMk cId="3870240619" sldId="260"/>
+            <ac:cxnSpMk id="64" creationId="{BCEAC996-DA22-759E-1CAE-AC6003C7857F}"/>
+          </ac:cxnSpMkLst>
+        </pc:cxnChg>
+        <pc:cxnChg chg="add del mod">
+          <ac:chgData name="全 香玉" userId="1f3450e5-81b9-4f7a-82d7-841c32c029e0" providerId="ADAL" clId="{670531AC-1667-4F97-B1A6-5D38F8A44A79}" dt="2026-05-06T11:40:27.076" v="52" actId="478"/>
+          <ac:cxnSpMkLst>
+            <pc:docMk/>
+            <pc:sldMk cId="3870240619" sldId="260"/>
+            <ac:cxnSpMk id="67" creationId="{5989C352-B5AD-26A1-612D-D5C25C8A2D0A}"/>
+          </ac:cxnSpMkLst>
+        </pc:cxnChg>
+        <pc:cxnChg chg="add del mod">
+          <ac:chgData name="全 香玉" userId="1f3450e5-81b9-4f7a-82d7-841c32c029e0" providerId="ADAL" clId="{670531AC-1667-4F97-B1A6-5D38F8A44A79}" dt="2026-05-06T11:40:25.904" v="51" actId="478"/>
+          <ac:cxnSpMkLst>
+            <pc:docMk/>
+            <pc:sldMk cId="3870240619" sldId="260"/>
+            <ac:cxnSpMk id="70" creationId="{3D1B8771-1435-40A9-AD17-CBF19696440C}"/>
+          </ac:cxnSpMkLst>
+        </pc:cxnChg>
+        <pc:cxnChg chg="add del mod">
+          <ac:chgData name="全 香玉" userId="1f3450e5-81b9-4f7a-82d7-841c32c029e0" providerId="ADAL" clId="{670531AC-1667-4F97-B1A6-5D38F8A44A79}" dt="2026-05-06T11:41:48.014" v="56" actId="478"/>
+          <ac:cxnSpMkLst>
+            <pc:docMk/>
+            <pc:sldMk cId="3870240619" sldId="260"/>
+            <ac:cxnSpMk id="73" creationId="{7A81F461-556F-3F7C-4A6F-6F7073E17268}"/>
+          </ac:cxnSpMkLst>
+        </pc:cxnChg>
+      </pc:sldChg>
+    </pc:docChg>
+  </pc:docChgLst>
+</pc:chgInfo>
 </file>
 
 <file path=ppt/slideLayouts/slideLayout1.xml><?xml version="1.0" encoding="utf-8"?>
@@ -272,7 +604,7 @@
           <a:p>
             <a:fld id="{9236E18D-A30F-4D3C-BC15-86FA9E93A319}" type="datetimeFigureOut">
               <a:rPr kumimoji="1" lang="ja-JP" altLang="en-US" smtClean="0"/>
-              <a:t>2026/4/30</a:t>
+              <a:t>2026/5/6</a:t>
             </a:fld>
             <a:endParaRPr kumimoji="1" lang="ja-JP" altLang="en-US"/>
           </a:p>
@@ -472,7 +804,7 @@
           <a:p>
             <a:fld id="{9236E18D-A30F-4D3C-BC15-86FA9E93A319}" type="datetimeFigureOut">
               <a:rPr kumimoji="1" lang="ja-JP" altLang="en-US" smtClean="0"/>
-              <a:t>2026/4/30</a:t>
+              <a:t>2026/5/6</a:t>
             </a:fld>
             <a:endParaRPr kumimoji="1" lang="ja-JP" altLang="en-US"/>
           </a:p>
@@ -682,7 +1014,7 @@
           <a:p>
             <a:fld id="{9236E18D-A30F-4D3C-BC15-86FA9E93A319}" type="datetimeFigureOut">
               <a:rPr kumimoji="1" lang="ja-JP" altLang="en-US" smtClean="0"/>
-              <a:t>2026/4/30</a:t>
+              <a:t>2026/5/6</a:t>
             </a:fld>
             <a:endParaRPr kumimoji="1" lang="ja-JP" altLang="en-US"/>
           </a:p>
@@ -882,7 +1214,7 @@
           <a:p>
             <a:fld id="{9236E18D-A30F-4D3C-BC15-86FA9E93A319}" type="datetimeFigureOut">
               <a:rPr kumimoji="1" lang="ja-JP" altLang="en-US" smtClean="0"/>
-              <a:t>2026/4/30</a:t>
+              <a:t>2026/5/6</a:t>
             </a:fld>
             <a:endParaRPr kumimoji="1" lang="ja-JP" altLang="en-US"/>
           </a:p>
@@ -1158,7 +1490,7 @@
           <a:p>
             <a:fld id="{9236E18D-A30F-4D3C-BC15-86FA9E93A319}" type="datetimeFigureOut">
               <a:rPr kumimoji="1" lang="ja-JP" altLang="en-US" smtClean="0"/>
-              <a:t>2026/4/30</a:t>
+              <a:t>2026/5/6</a:t>
             </a:fld>
             <a:endParaRPr kumimoji="1" lang="ja-JP" altLang="en-US"/>
           </a:p>
@@ -1426,7 +1758,7 @@
           <a:p>
             <a:fld id="{9236E18D-A30F-4D3C-BC15-86FA9E93A319}" type="datetimeFigureOut">
               <a:rPr kumimoji="1" lang="ja-JP" altLang="en-US" smtClean="0"/>
-              <a:t>2026/4/30</a:t>
+              <a:t>2026/5/6</a:t>
             </a:fld>
             <a:endParaRPr kumimoji="1" lang="ja-JP" altLang="en-US"/>
           </a:p>
@@ -1841,7 +2173,7 @@
           <a:p>
             <a:fld id="{9236E18D-A30F-4D3C-BC15-86FA9E93A319}" type="datetimeFigureOut">
               <a:rPr kumimoji="1" lang="ja-JP" altLang="en-US" smtClean="0"/>
-              <a:t>2026/4/30</a:t>
+              <a:t>2026/5/6</a:t>
             </a:fld>
             <a:endParaRPr kumimoji="1" lang="ja-JP" altLang="en-US"/>
           </a:p>
@@ -1983,7 +2315,7 @@
           <a:p>
             <a:fld id="{9236E18D-A30F-4D3C-BC15-86FA9E93A319}" type="datetimeFigureOut">
               <a:rPr kumimoji="1" lang="ja-JP" altLang="en-US" smtClean="0"/>
-              <a:t>2026/4/30</a:t>
+              <a:t>2026/5/6</a:t>
             </a:fld>
             <a:endParaRPr kumimoji="1" lang="ja-JP" altLang="en-US"/>
           </a:p>
@@ -2096,7 +2428,7 @@
           <a:p>
             <a:fld id="{9236E18D-A30F-4D3C-BC15-86FA9E93A319}" type="datetimeFigureOut">
               <a:rPr kumimoji="1" lang="ja-JP" altLang="en-US" smtClean="0"/>
-              <a:t>2026/4/30</a:t>
+              <a:t>2026/5/6</a:t>
             </a:fld>
             <a:endParaRPr kumimoji="1" lang="ja-JP" altLang="en-US"/>
           </a:p>
@@ -2409,7 +2741,7 @@
           <a:p>
             <a:fld id="{9236E18D-A30F-4D3C-BC15-86FA9E93A319}" type="datetimeFigureOut">
               <a:rPr kumimoji="1" lang="ja-JP" altLang="en-US" smtClean="0"/>
-              <a:t>2026/4/30</a:t>
+              <a:t>2026/5/6</a:t>
             </a:fld>
             <a:endParaRPr kumimoji="1" lang="ja-JP" altLang="en-US"/>
           </a:p>
@@ -2698,7 +3030,7 @@
           <a:p>
             <a:fld id="{9236E18D-A30F-4D3C-BC15-86FA9E93A319}" type="datetimeFigureOut">
               <a:rPr kumimoji="1" lang="ja-JP" altLang="en-US" smtClean="0"/>
-              <a:t>2026/4/30</a:t>
+              <a:t>2026/5/6</a:t>
             </a:fld>
             <a:endParaRPr kumimoji="1" lang="ja-JP" altLang="en-US"/>
           </a:p>
@@ -2941,7 +3273,7 @@
           <a:p>
             <a:fld id="{9236E18D-A30F-4D3C-BC15-86FA9E93A319}" type="datetimeFigureOut">
               <a:rPr kumimoji="1" lang="ja-JP" altLang="en-US" smtClean="0"/>
-              <a:t>2026/4/30</a:t>
+              <a:t>2026/5/6</a:t>
             </a:fld>
             <a:endParaRPr kumimoji="1" lang="ja-JP" altLang="en-US"/>
           </a:p>
@@ -7907,11 +8239,12 @@
 </file>
 
 <file path=customXml/item1.xml><?xml version="1.0" encoding="utf-8"?>
-<p:properties xmlns:p="http://schemas.microsoft.com/office/2006/metadata/properties" xmlns:xsi="http://www.w3.org/2001/XMLSchema-instance" xmlns:pc="http://schemas.microsoft.com/office/infopath/2007/PartnerControls">
-  <documentManagement>
-    <_activity xmlns="e5fea337-426f-4878-aaa1-6cc4dbed00d3" xsi:nil="true"/>
-  </documentManagement>
-</p:properties>
+<?mso-contentType ?>
+<FormTemplates xmlns="http://schemas.microsoft.com/sharepoint/v3/contenttype/forms">
+  <Display>DocumentLibraryForm</Display>
+  <Edit>DocumentLibraryForm</Edit>
+  <New>DocumentLibraryForm</New>
+</FormTemplates>
 </file>
 
 <file path=customXml/item2.xml><?xml version="1.0" encoding="utf-8"?>
@@ -8109,26 +8442,17 @@
 </file>
 
 <file path=customXml/item3.xml><?xml version="1.0" encoding="utf-8"?>
-<?mso-contentType ?>
-<FormTemplates xmlns="http://schemas.microsoft.com/sharepoint/v3/contenttype/forms">
-  <Display>DocumentLibraryForm</Display>
-  <Edit>DocumentLibraryForm</Edit>
-  <New>DocumentLibraryForm</New>
-</FormTemplates>
+<p:properties xmlns:p="http://schemas.microsoft.com/office/2006/metadata/properties" xmlns:xsi="http://www.w3.org/2001/XMLSchema-instance" xmlns:pc="http://schemas.microsoft.com/office/infopath/2007/PartnerControls">
+  <documentManagement>
+    <_activity xmlns="e5fea337-426f-4878-aaa1-6cc4dbed00d3" xsi:nil="true"/>
+  </documentManagement>
+</p:properties>
 </file>
 
 <file path=customXml/itemProps1.xml><?xml version="1.0" encoding="utf-8"?>
-<ds:datastoreItem xmlns:ds="http://schemas.openxmlformats.org/officeDocument/2006/customXml" ds:itemID="{E690C700-0B54-4769-9477-9FE646BEDBDF}">
+<ds:datastoreItem xmlns:ds="http://schemas.openxmlformats.org/officeDocument/2006/customXml" ds:itemID="{EBB85C3E-FFAD-4A75-A769-4B97E54A903C}">
   <ds:schemaRefs>
-    <ds:schemaRef ds:uri="e5fea337-426f-4878-aaa1-6cc4dbed00d3"/>
-    <ds:schemaRef ds:uri="http://schemas.microsoft.com/office/infopath/2007/PartnerControls"/>
-    <ds:schemaRef ds:uri="http://www.w3.org/XML/1998/namespace"/>
-    <ds:schemaRef ds:uri="http://schemas.microsoft.com/office/2006/documentManagement/types"/>
-    <ds:schemaRef ds:uri="http://purl.org/dc/dcmitype/"/>
-    <ds:schemaRef ds:uri="http://purl.org/dc/terms/"/>
-    <ds:schemaRef ds:uri="http://purl.org/dc/elements/1.1/"/>
-    <ds:schemaRef ds:uri="http://schemas.openxmlformats.org/package/2006/metadata/core-properties"/>
-    <ds:schemaRef ds:uri="http://schemas.microsoft.com/office/2006/metadata/properties"/>
+    <ds:schemaRef ds:uri="http://schemas.microsoft.com/sharepoint/v3/contenttype/forms"/>
   </ds:schemaRefs>
 </ds:datastoreItem>
 </file>
@@ -8152,9 +8476,17 @@
 </file>
 
 <file path=customXml/itemProps3.xml><?xml version="1.0" encoding="utf-8"?>
-<ds:datastoreItem xmlns:ds="http://schemas.openxmlformats.org/officeDocument/2006/customXml" ds:itemID="{EBB85C3E-FFAD-4A75-A769-4B97E54A903C}">
+<ds:datastoreItem xmlns:ds="http://schemas.openxmlformats.org/officeDocument/2006/customXml" ds:itemID="{E690C700-0B54-4769-9477-9FE646BEDBDF}">
   <ds:schemaRefs>
-    <ds:schemaRef ds:uri="http://schemas.microsoft.com/sharepoint/v3/contenttype/forms"/>
+    <ds:schemaRef ds:uri="e5fea337-426f-4878-aaa1-6cc4dbed00d3"/>
+    <ds:schemaRef ds:uri="http://schemas.microsoft.com/office/infopath/2007/PartnerControls"/>
+    <ds:schemaRef ds:uri="http://www.w3.org/XML/1998/namespace"/>
+    <ds:schemaRef ds:uri="http://schemas.microsoft.com/office/2006/documentManagement/types"/>
+    <ds:schemaRef ds:uri="http://purl.org/dc/dcmitype/"/>
+    <ds:schemaRef ds:uri="http://purl.org/dc/terms/"/>
+    <ds:schemaRef ds:uri="http://purl.org/dc/elements/1.1/"/>
+    <ds:schemaRef ds:uri="http://schemas.openxmlformats.org/package/2006/metadata/core-properties"/>
+    <ds:schemaRef ds:uri="http://schemas.microsoft.com/office/2006/metadata/properties"/>
   </ds:schemaRefs>
 </ds:datastoreItem>
 </file>
--- a/Materials.pptx
+++ b/Materials.pptx
@@ -12,6 +12,8 @@
     <p:sldId id="260" r:id="rId9"/>
     <p:sldId id="261" r:id="rId10"/>
     <p:sldId id="262" r:id="rId11"/>
+    <p:sldId id="263" r:id="rId12"/>
+    <p:sldId id="264" r:id="rId13"/>
   </p:sldIdLst>
   <p:sldSz cx="12192000" cy="6858000"/>
   <p:notesSz cx="6858000" cy="9144000"/>
@@ -512,7 +514,7 @@
           <a:p>
             <a:fld id="{9236E18D-A30F-4D3C-BC15-86FA9E93A319}" type="datetimeFigureOut">
               <a:rPr kumimoji="1" lang="ja-JP" altLang="en-US" smtClean="0"/>
-              <a:t>2026/6/11</a:t>
+              <a:t>2026/6/12</a:t>
             </a:fld>
             <a:endParaRPr kumimoji="1" lang="ja-JP" altLang="en-US"/>
           </a:p>
@@ -712,7 +714,7 @@
           <a:p>
             <a:fld id="{9236E18D-A30F-4D3C-BC15-86FA9E93A319}" type="datetimeFigureOut">
               <a:rPr kumimoji="1" lang="ja-JP" altLang="en-US" smtClean="0"/>
-              <a:t>2026/6/11</a:t>
+              <a:t>2026/6/12</a:t>
             </a:fld>
             <a:endParaRPr kumimoji="1" lang="ja-JP" altLang="en-US"/>
           </a:p>
@@ -922,7 +924,7 @@
           <a:p>
             <a:fld id="{9236E18D-A30F-4D3C-BC15-86FA9E93A319}" type="datetimeFigureOut">
               <a:rPr kumimoji="1" lang="ja-JP" altLang="en-US" smtClean="0"/>
-              <a:t>2026/6/11</a:t>
+              <a:t>2026/6/12</a:t>
             </a:fld>
             <a:endParaRPr kumimoji="1" lang="ja-JP" altLang="en-US"/>
           </a:p>
@@ -1122,7 +1124,7 @@
           <a:p>
             <a:fld id="{9236E18D-A30F-4D3C-BC15-86FA9E93A319}" type="datetimeFigureOut">
               <a:rPr kumimoji="1" lang="ja-JP" altLang="en-US" smtClean="0"/>
-              <a:t>2026/6/11</a:t>
+              <a:t>2026/6/12</a:t>
             </a:fld>
             <a:endParaRPr kumimoji="1" lang="ja-JP" altLang="en-US"/>
           </a:p>
@@ -1398,7 +1400,7 @@
           <a:p>
             <a:fld id="{9236E18D-A30F-4D3C-BC15-86FA9E93A319}" type="datetimeFigureOut">
               <a:rPr kumimoji="1" lang="ja-JP" altLang="en-US" smtClean="0"/>
-              <a:t>2026/6/11</a:t>
+              <a:t>2026/6/12</a:t>
             </a:fld>
             <a:endParaRPr kumimoji="1" lang="ja-JP" altLang="en-US"/>
           </a:p>
@@ -1666,7 +1668,7 @@
           <a:p>
             <a:fld id="{9236E18D-A30F-4D3C-BC15-86FA9E93A319}" type="datetimeFigureOut">
               <a:rPr kumimoji="1" lang="ja-JP" altLang="en-US" smtClean="0"/>
-              <a:t>2026/6/11</a:t>
+              <a:t>2026/6/12</a:t>
             </a:fld>
             <a:endParaRPr kumimoji="1" lang="ja-JP" altLang="en-US"/>
           </a:p>
@@ -2081,7 +2083,7 @@
           <a:p>
             <a:fld id="{9236E18D-A30F-4D3C-BC15-86FA9E93A319}" type="datetimeFigureOut">
               <a:rPr kumimoji="1" lang="ja-JP" altLang="en-US" smtClean="0"/>
-              <a:t>2026/6/11</a:t>
+              <a:t>2026/6/12</a:t>
             </a:fld>
             <a:endParaRPr kumimoji="1" lang="ja-JP" altLang="en-US"/>
           </a:p>
@@ -2223,7 +2225,7 @@
           <a:p>
             <a:fld id="{9236E18D-A30F-4D3C-BC15-86FA9E93A319}" type="datetimeFigureOut">
               <a:rPr kumimoji="1" lang="ja-JP" altLang="en-US" smtClean="0"/>
-              <a:t>2026/6/11</a:t>
+              <a:t>2026/6/12</a:t>
             </a:fld>
             <a:endParaRPr kumimoji="1" lang="ja-JP" altLang="en-US"/>
           </a:p>
@@ -2336,7 +2338,7 @@
           <a:p>
             <a:fld id="{9236E18D-A30F-4D3C-BC15-86FA9E93A319}" type="datetimeFigureOut">
               <a:rPr kumimoji="1" lang="ja-JP" altLang="en-US" smtClean="0"/>
-              <a:t>2026/6/11</a:t>
+              <a:t>2026/6/12</a:t>
             </a:fld>
             <a:endParaRPr kumimoji="1" lang="ja-JP" altLang="en-US"/>
           </a:p>
@@ -2649,7 +2651,7 @@
           <a:p>
             <a:fld id="{9236E18D-A30F-4D3C-BC15-86FA9E93A319}" type="datetimeFigureOut">
               <a:rPr kumimoji="1" lang="ja-JP" altLang="en-US" smtClean="0"/>
-              <a:t>2026/6/11</a:t>
+              <a:t>2026/6/12</a:t>
             </a:fld>
             <a:endParaRPr kumimoji="1" lang="ja-JP" altLang="en-US"/>
           </a:p>
@@ -2938,7 +2940,7 @@
           <a:p>
             <a:fld id="{9236E18D-A30F-4D3C-BC15-86FA9E93A319}" type="datetimeFigureOut">
               <a:rPr kumimoji="1" lang="ja-JP" altLang="en-US" smtClean="0"/>
-              <a:t>2026/6/11</a:t>
+              <a:t>2026/6/12</a:t>
             </a:fld>
             <a:endParaRPr kumimoji="1" lang="ja-JP" altLang="en-US"/>
           </a:p>
@@ -3181,7 +3183,7 @@
           <a:p>
             <a:fld id="{9236E18D-A30F-4D3C-BC15-86FA9E93A319}" type="datetimeFigureOut">
               <a:rPr kumimoji="1" lang="ja-JP" altLang="en-US" smtClean="0"/>
-              <a:t>2026/6/11</a:t>
+              <a:t>2026/6/12</a:t>
             </a:fld>
             <a:endParaRPr kumimoji="1" lang="ja-JP" altLang="en-US"/>
           </a:p>
@@ -9542,6 +9544,173 @@
 </p:sld>
 </file>
 
+<file path=ppt/slides/slide8.xml><?xml version="1.0" encoding="utf-8"?>
+<p:sld xmlns:a="http://schemas.openxmlformats.org/drawingml/2006/main" xmlns:r="http://schemas.openxmlformats.org/officeDocument/2006/relationships" xmlns:p="http://schemas.openxmlformats.org/presentationml/2006/main">
+  <p:cSld>
+    <p:spTree>
+      <p:nvGrpSpPr>
+        <p:cNvPr id="1" name=""/>
+        <p:cNvGrpSpPr/>
+        <p:nvPr/>
+      </p:nvGrpSpPr>
+      <p:grpSpPr>
+        <a:xfrm>
+          <a:off x="0" y="0"/>
+          <a:ext cx="0" cy="0"/>
+          <a:chOff x="0" y="0"/>
+          <a:chExt cx="0" cy="0"/>
+        </a:xfrm>
+      </p:grpSpPr>
+      <p:pic>
+        <p:nvPicPr>
+          <p:cNvPr id="1026" name="Picture 2">
+            <a:extLst>
+              <a:ext uri="{FF2B5EF4-FFF2-40B4-BE49-F238E27FC236}">
+                <a16:creationId xmlns:a16="http://schemas.microsoft.com/office/drawing/2014/main" id="{3485933C-CB95-47C5-8504-790EE28B027D}"/>
+              </a:ext>
+            </a:extLst>
+          </p:cNvPr>
+          <p:cNvPicPr>
+            <a:picLocks noChangeAspect="1" noChangeArrowheads="1"/>
+          </p:cNvPicPr>
+          <p:nvPr/>
+        </p:nvPicPr>
+        <p:blipFill>
+          <a:blip r:embed="rId2">
+            <a:extLst>
+              <a:ext uri="{28A0092B-C50C-407E-A947-70E740481C1C}">
+                <a14:useLocalDpi xmlns:a14="http://schemas.microsoft.com/office/drawing/2010/main" val="0"/>
+              </a:ext>
+            </a:extLst>
+          </a:blip>
+          <a:srcRect/>
+          <a:stretch>
+            <a:fillRect/>
+          </a:stretch>
+        </p:blipFill>
+        <p:spPr bwMode="auto">
+          <a:xfrm>
+            <a:off x="2660650" y="1268413"/>
+            <a:ext cx="5715000" cy="3800475"/>
+          </a:xfrm>
+          <a:prstGeom prst="rect">
+            <a:avLst/>
+          </a:prstGeom>
+          <a:noFill/>
+          <a:extLst>
+            <a:ext uri="{909E8E84-426E-40DD-AFC4-6F175D3DCCD1}">
+              <a14:hiddenFill xmlns:a14="http://schemas.microsoft.com/office/drawing/2010/main">
+                <a:solidFill>
+                  <a:srgbClr val="FFFFFF"/>
+                </a:solidFill>
+              </a14:hiddenFill>
+            </a:ext>
+          </a:extLst>
+        </p:spPr>
+      </p:pic>
+    </p:spTree>
+    <p:extLst>
+      <p:ext uri="{BB962C8B-B14F-4D97-AF65-F5344CB8AC3E}">
+        <p14:creationId xmlns:p14="http://schemas.microsoft.com/office/powerpoint/2010/main" val="2490935508"/>
+      </p:ext>
+    </p:extLst>
+  </p:cSld>
+  <p:clrMapOvr>
+    <a:masterClrMapping/>
+  </p:clrMapOvr>
+</p:sld>
+</file>
+
+<file path=ppt/slides/slide9.xml><?xml version="1.0" encoding="utf-8"?>
+<p:sld xmlns:a="http://schemas.openxmlformats.org/drawingml/2006/main" xmlns:r="http://schemas.openxmlformats.org/officeDocument/2006/relationships" xmlns:p="http://schemas.openxmlformats.org/presentationml/2006/main">
+  <p:cSld>
+    <p:spTree>
+      <p:nvGrpSpPr>
+        <p:cNvPr id="1" name=""/>
+        <p:cNvGrpSpPr/>
+        <p:nvPr/>
+      </p:nvGrpSpPr>
+      <p:grpSpPr>
+        <a:xfrm>
+          <a:off x="0" y="0"/>
+          <a:ext cx="0" cy="0"/>
+          <a:chOff x="0" y="0"/>
+          <a:chExt cx="0" cy="0"/>
+        </a:xfrm>
+      </p:grpSpPr>
+      <p:pic>
+        <p:nvPicPr>
+          <p:cNvPr id="5" name="그림 4">
+            <a:extLst>
+              <a:ext uri="{FF2B5EF4-FFF2-40B4-BE49-F238E27FC236}">
+                <a16:creationId xmlns:a16="http://schemas.microsoft.com/office/drawing/2014/main" id="{414CC4C9-79AC-AC4A-2FA0-0C87D8914DF0}"/>
+              </a:ext>
+            </a:extLst>
+          </p:cNvPr>
+          <p:cNvPicPr>
+            <a:picLocks noChangeAspect="1"/>
+          </p:cNvPicPr>
+          <p:nvPr/>
+        </p:nvPicPr>
+        <p:blipFill>
+          <a:blip r:embed="rId2"/>
+          <a:stretch>
+            <a:fillRect/>
+          </a:stretch>
+        </p:blipFill>
+        <p:spPr>
+          <a:xfrm>
+            <a:off x="343427" y="0"/>
+            <a:ext cx="7059526" cy="6858000"/>
+          </a:xfrm>
+          <a:prstGeom prst="rect">
+            <a:avLst/>
+          </a:prstGeom>
+        </p:spPr>
+      </p:pic>
+      <p:pic>
+        <p:nvPicPr>
+          <p:cNvPr id="7" name="그림 6">
+            <a:extLst>
+              <a:ext uri="{FF2B5EF4-FFF2-40B4-BE49-F238E27FC236}">
+                <a16:creationId xmlns:a16="http://schemas.microsoft.com/office/drawing/2014/main" id="{59682CF8-21B5-9BFA-D0EE-75A936A6A080}"/>
+              </a:ext>
+            </a:extLst>
+          </p:cNvPr>
+          <p:cNvPicPr>
+            <a:picLocks noChangeAspect="1"/>
+          </p:cNvPicPr>
+          <p:nvPr/>
+        </p:nvPicPr>
+        <p:blipFill>
+          <a:blip r:embed="rId3"/>
+          <a:stretch>
+            <a:fillRect/>
+          </a:stretch>
+        </p:blipFill>
+        <p:spPr>
+          <a:xfrm>
+            <a:off x="6245271" y="3166946"/>
+            <a:ext cx="5673241" cy="2902353"/>
+          </a:xfrm>
+          <a:prstGeom prst="rect">
+            <a:avLst/>
+          </a:prstGeom>
+        </p:spPr>
+      </p:pic>
+    </p:spTree>
+    <p:extLst>
+      <p:ext uri="{BB962C8B-B14F-4D97-AF65-F5344CB8AC3E}">
+        <p14:creationId xmlns:p14="http://schemas.microsoft.com/office/powerpoint/2010/main" val="271509145"/>
+      </p:ext>
+    </p:extLst>
+  </p:cSld>
+  <p:clrMapOvr>
+    <a:masterClrMapping/>
+  </p:clrMapOvr>
+</p:sld>
+</file>
+
 <file path=ppt/theme/theme1.xml><?xml version="1.0" encoding="utf-8"?>
 <a:theme xmlns:a="http://schemas.openxmlformats.org/drawingml/2006/main" name="Office Theme">
   <a:themeElements>
@@ -9858,6 +10027,15 @@
 </file>
 
 <file path=customXml/item1.xml><?xml version="1.0" encoding="utf-8"?>
+<?mso-contentType ?>
+<FormTemplates xmlns="http://schemas.microsoft.com/sharepoint/v3/contenttype/forms">
+  <Display>DocumentLibraryForm</Display>
+  <Edit>DocumentLibraryForm</Edit>
+  <New>DocumentLibraryForm</New>
+</FormTemplates>
+</file>
+
+<file path=customXml/item2.xml><?xml version="1.0" encoding="utf-8"?>
 <ct:contentTypeSchema xmlns:ct="http://schemas.microsoft.com/office/2006/metadata/contentType" xmlns:ma="http://schemas.microsoft.com/office/2006/metadata/properties/metaAttributes" ct:_="" ma:_="" ma:contentTypeName="ドキュメント" ma:contentTypeID="0x010100D291828BE931164DA279E7DB37510E8B" ma:contentTypeVersion="12" ma:contentTypeDescription="新しいドキュメントを作成します。" ma:contentTypeScope="" ma:versionID="d40e79753e265535ebdef0a9a1630dbe">
   <xsd:schema xmlns:xsd="http://www.w3.org/2001/XMLSchema" xmlns:xs="http://www.w3.org/2001/XMLSchema" xmlns:p="http://schemas.microsoft.com/office/2006/metadata/properties" xmlns:ns3="e5fea337-426f-4878-aaa1-6cc4dbed00d3" targetNamespace="http://schemas.microsoft.com/office/2006/metadata/properties" ma:root="true" ma:fieldsID="909ec013045a4ae227a46cef79b1603d" ns3:_="">
     <xsd:import namespace="e5fea337-426f-4878-aaa1-6cc4dbed00d3"/>
@@ -10051,15 +10229,6 @@
 </ct:contentTypeSchema>
 </file>
 
-<file path=customXml/item2.xml><?xml version="1.0" encoding="utf-8"?>
-<?mso-contentType ?>
-<FormTemplates xmlns="http://schemas.microsoft.com/sharepoint/v3/contenttype/forms">
-  <Display>DocumentLibraryForm</Display>
-  <Edit>DocumentLibraryForm</Edit>
-  <New>DocumentLibraryForm</New>
-</FormTemplates>
-</file>
-
 <file path=customXml/item3.xml><?xml version="1.0" encoding="utf-8"?>
 <p:properties xmlns:p="http://schemas.microsoft.com/office/2006/metadata/properties" xmlns:xsi="http://www.w3.org/2001/XMLSchema-instance" xmlns:pc="http://schemas.microsoft.com/office/infopath/2007/PartnerControls">
   <documentManagement>
@@ -10069,6 +10238,14 @@
 </file>
 
 <file path=customXml/itemProps1.xml><?xml version="1.0" encoding="utf-8"?>
+<ds:datastoreItem xmlns:ds="http://schemas.openxmlformats.org/officeDocument/2006/customXml" ds:itemID="{EBB85C3E-FFAD-4A75-A769-4B97E54A903C}">
+  <ds:schemaRefs>
+    <ds:schemaRef ds:uri="http://schemas.microsoft.com/sharepoint/v3/contenttype/forms"/>
+  </ds:schemaRefs>
+</ds:datastoreItem>
+</file>
+
+<file path=customXml/itemProps2.xml><?xml version="1.0" encoding="utf-8"?>
 <ds:datastoreItem xmlns:ds="http://schemas.openxmlformats.org/officeDocument/2006/customXml" ds:itemID="{6231A16C-3E0A-4893-9CB3-DA6770BA5700}">
   <ds:schemaRefs>
     <ds:schemaRef ds:uri="http://schemas.microsoft.com/office/2006/metadata/contentType"/>
@@ -10082,14 +10259,6 @@
     <ds:schemaRef ds:uri="http://purl.org/dc/elements/1.1/"/>
     <ds:schemaRef ds:uri="http://purl.org/dc/terms/"/>
     <ds:schemaRef ds:uri="http://schemas.microsoft.com/internal/obd"/>
-  </ds:schemaRefs>
-</ds:datastoreItem>
-</file>
-
-<file path=customXml/itemProps2.xml><?xml version="1.0" encoding="utf-8"?>
-<ds:datastoreItem xmlns:ds="http://schemas.openxmlformats.org/officeDocument/2006/customXml" ds:itemID="{EBB85C3E-FFAD-4A75-A769-4B97E54A903C}">
-  <ds:schemaRefs>
-    <ds:schemaRef ds:uri="http://schemas.microsoft.com/sharepoint/v3/contenttype/forms"/>
   </ds:schemaRefs>
 </ds:datastoreItem>
 </file>
